--- a/output/slide_v3.pptx
+++ b/output/slide_v3.pptx
@@ -10,8 +10,8 @@
   <p:notesMasterIdLst>
     <p:notesMasterId r:id="rId3"/>
   </p:notesMasterIdLst>
-  <p:sldSz cx="12192000" cy="6858000"/>
-  <p:notesSz cx="6858000" cy="12192000"/>
+  <p:sldSz cx="9144000" cy="5143500"/>
+  <p:notesSz cx="5143500" cy="9144000"/>
   <p:defaultTextStyle>
     <a:lvl1pPr marL="0" algn="l" defTabSz="914400" rtl="0" eaLnBrk="1" latinLnBrk="0" hangingPunct="1">
       <a:defRPr sz="1800" kern="1200">
@@ -883,169 +883,8 @@
         </p:nvSpPr>
         <p:spPr>
           <a:xfrm>
-            <a:off x="457200" y="320040"/>
-            <a:ext cx="11274552" cy="777240"/>
-          </a:xfrm>
-          <a:prstGeom prst="rect">
-            <a:avLst/>
-          </a:prstGeom>
-          <a:noFill/>
-          <a:ln/>
-        </p:spPr>
-        <p:txBody>
-          <a:bodyPr wrap="square" lIns="0" tIns="0" rIns="0" bIns="0" rtlCol="0" anchor="t"/>
-          <a:lstStyle/>
-          <a:p>
-            <a:pPr indent="0" marL="0">
-              <a:buNone/>
-            </a:pPr>
-            <a:r>
-              <a:rPr lang="en-US" sz="2200" b="1" dirty="0">
-                <a:solidFill>
-                  <a:srgbClr val="000000"/>
-                </a:solidFill>
-                <a:latin typeface="Georgia" pitchFamily="34" charset="0"/>
-                <a:ea typeface="Georgia" pitchFamily="34" charset="-122"/>
-                <a:cs typeface="Georgia" pitchFamily="34" charset="-120"/>
-              </a:rPr>
-              <a:t>The Netherlands aims to become Europe's green hydrogen hub,</a:t>
-            </a:r>
-            <a:endParaRPr lang="en-US" sz="2200" dirty="0"/>
-          </a:p>
-          <a:p>
-            <a:pPr indent="0" marL="0">
-              <a:buNone/>
-            </a:pPr>
-            <a:r>
-              <a:rPr lang="en-US" sz="2200" b="1" dirty="0">
-                <a:solidFill>
-                  <a:srgbClr val="000000"/>
-                </a:solidFill>
-                <a:latin typeface="Georgia" pitchFamily="34" charset="0"/>
-                <a:ea typeface="Georgia" pitchFamily="34" charset="-122"/>
-                <a:cs typeface="Georgia" pitchFamily="34" charset="-120"/>
-              </a:rPr>
-              <a:t>scaling from 500 MW to 3-4 GW by 2030</a:t>
-            </a:r>
-            <a:endParaRPr lang="en-US" sz="2200" dirty="0"/>
-          </a:p>
-        </p:txBody>
-      </p:sp>
-      <p:sp>
-        <p:nvSpPr>
-          <p:cNvPr id="3" name="Text 1"/>
-          <p:cNvSpPr/>
-          <p:nvPr/>
-        </p:nvSpPr>
-        <p:spPr>
-          <a:xfrm>
-            <a:off x="457200" y="1143000"/>
-            <a:ext cx="11274552" cy="228600"/>
-          </a:xfrm>
-          <a:prstGeom prst="rect">
-            <a:avLst/>
-          </a:prstGeom>
-          <a:noFill/>
-          <a:ln/>
-        </p:spPr>
-        <p:txBody>
-          <a:bodyPr wrap="square" lIns="0" tIns="0" rIns="0" bIns="0" rtlCol="0" anchor="t"/>
-          <a:lstStyle/>
-          <a:p>
-            <a:pPr indent="0" marL="0">
-              <a:buNone/>
-            </a:pPr>
-            <a:r>
-              <a:rPr lang="en-US" sz="1000" dirty="0">
-                <a:solidFill>
-                  <a:srgbClr val="888888"/>
-                </a:solidFill>
-                <a:latin typeface="Calibri" pitchFamily="34" charset="0"/>
-                <a:ea typeface="Calibri" pitchFamily="34" charset="-122"/>
-                <a:cs typeface="Calibri" pitchFamily="34" charset="-120"/>
-              </a:rPr>
-              <a:t>Dutch National Hydrogen Strategy timeline, 2020-2035</a:t>
-            </a:r>
-            <a:endParaRPr lang="en-US" sz="1000" dirty="0"/>
-          </a:p>
-        </p:txBody>
-      </p:sp>
-      <p:sp>
-        <p:nvSpPr>
-          <p:cNvPr id="4" name="Shape 2"/>
-          <p:cNvSpPr/>
-          <p:nvPr/>
-        </p:nvSpPr>
-        <p:spPr>
-          <a:xfrm>
-            <a:off x="457200" y="1417320"/>
-            <a:ext cx="11274552" cy="0"/>
-          </a:xfrm>
-          <a:prstGeom prst="line">
-            <a:avLst/>
-          </a:prstGeom>
-          <a:noFill/>
-          <a:ln w="9525">
-            <a:solidFill>
-              <a:srgbClr val="C00000"/>
-            </a:solidFill>
-            <a:prstDash val="solid"/>
-          </a:ln>
-        </p:spPr>
-      </p:sp>
-      <p:sp>
-        <p:nvSpPr>
-          <p:cNvPr id="5" name="Shape 3"/>
-          <p:cNvSpPr/>
-          <p:nvPr/>
-        </p:nvSpPr>
-        <p:spPr>
-          <a:xfrm>
-            <a:off x="914400" y="2651760"/>
-            <a:ext cx="10058400" cy="0"/>
-          </a:xfrm>
-          <a:prstGeom prst="line">
-            <a:avLst/>
-          </a:prstGeom>
-          <a:noFill/>
-          <a:ln w="19050">
-            <a:solidFill>
-              <a:srgbClr val="0C2340"/>
-            </a:solidFill>
-            <a:prstDash val="solid"/>
-          </a:ln>
-        </p:spPr>
-      </p:sp>
-      <p:sp>
-        <p:nvSpPr>
-          <p:cNvPr id="6" name="Shape 4"/>
-          <p:cNvSpPr/>
-          <p:nvPr/>
-        </p:nvSpPr>
-        <p:spPr>
-          <a:xfrm>
-            <a:off x="795528" y="2532888"/>
-            <a:ext cx="237744" cy="237744"/>
-          </a:xfrm>
-          <a:prstGeom prst="ellipse">
-            <a:avLst/>
-          </a:prstGeom>
-          <a:solidFill>
-            <a:srgbClr val="0C2340"/>
-          </a:solidFill>
-          <a:ln/>
-        </p:spPr>
-      </p:sp>
-      <p:sp>
-        <p:nvSpPr>
-          <p:cNvPr id="7" name="Text 5"/>
-          <p:cNvSpPr/>
-          <p:nvPr/>
-        </p:nvSpPr>
-        <p:spPr>
-          <a:xfrm>
-            <a:off x="704088" y="2514600"/>
-            <a:ext cx="420624" cy="274320"/>
+            <a:off x="457200" y="137160"/>
+            <a:ext cx="8229600" cy="640080"/>
           </a:xfrm>
           <a:prstGeom prst="rect">
             <a:avLst/>
@@ -1057,42 +896,65 @@
           <a:bodyPr wrap="square" lIns="0" tIns="0" rIns="0" bIns="0" rtlCol="0" anchor="ctr"/>
           <a:lstStyle/>
           <a:p>
-            <a:pPr algn="ctr" indent="0" marL="0">
+            <a:pPr indent="0" marL="0">
+              <a:lnSpc>
+                <a:spcPct val="110000"/>
+              </a:lnSpc>
               <a:buNone/>
             </a:pPr>
             <a:r>
-              <a:rPr lang="en-US" sz="750" b="1" dirty="0">
+              <a:rPr lang="en-US" sz="2000" b="1" dirty="0">
                 <a:solidFill>
-                  <a:srgbClr val="FFFFFF"/>
+                  <a:srgbClr val="000000"/>
                 </a:solidFill>
-                <a:latin typeface="Calibri" pitchFamily="34" charset="0"/>
-                <a:ea typeface="Calibri" pitchFamily="34" charset="-122"/>
-                <a:cs typeface="Calibri" pitchFamily="34" charset="-120"/>
+                <a:latin typeface="Georgia" pitchFamily="34" charset="0"/>
+                <a:ea typeface="Georgia" pitchFamily="34" charset="-122"/>
+                <a:cs typeface="Georgia" pitchFamily="34" charset="-120"/>
               </a:rPr>
-              <a:t>2020</a:t>
+              <a:t>1.1/ China leads the global EV transition with 60% market share,</a:t>
             </a:r>
-            <a:endParaRPr lang="en-US" sz="750" dirty="0"/>
+            <a:endParaRPr lang="en-US" sz="2000" dirty="0"/>
+          </a:p>
+          <a:p>
+            <a:pPr indent="0" marL="0">
+              <a:lnSpc>
+                <a:spcPct val="110000"/>
+              </a:lnSpc>
+              <a:buNone/>
+            </a:pPr>
+            <a:r>
+              <a:rPr lang="en-US" sz="2000" b="1" dirty="0">
+                <a:solidFill>
+                  <a:srgbClr val="000000"/>
+                </a:solidFill>
+                <a:latin typeface="Georgia" pitchFamily="34" charset="0"/>
+                <a:ea typeface="Georgia" pitchFamily="34" charset="-122"/>
+                <a:cs typeface="Georgia" pitchFamily="34" charset="-120"/>
+              </a:rPr>
+              <a:t>but Europe and the US are closing the gap rapidly</a:t>
+            </a:r>
+            <a:endParaRPr lang="en-US" sz="2000" dirty="0"/>
           </a:p>
         </p:txBody>
       </p:sp>
       <p:sp>
         <p:nvSpPr>
-          <p:cNvPr id="8" name="Shape 6"/>
+          <p:cNvPr id="3" name="Shape 1"/>
           <p:cNvSpPr/>
           <p:nvPr/>
         </p:nvSpPr>
         <p:spPr>
           <a:xfrm>
-            <a:off x="914400" y="2377440"/>
-            <a:ext cx="0" cy="137160"/>
+            <a:off x="457200" y="868680"/>
+            <a:ext cx="8229600" cy="0"/>
           </a:xfrm>
           <a:prstGeom prst="line">
             <a:avLst/>
           </a:prstGeom>
           <a:noFill/>
-          <a:ln w="9525">
+          <a:ln w="12700">
             <a:solidFill>
-              <a:srgbClr val="0C2340"/>
+              <a:srgbClr val="333333"/>
             </a:solidFill>
             <a:prstDash val="solid"/>
           </a:ln>
@@ -1100,90 +962,14 @@
       </p:sp>
       <p:sp>
         <p:nvSpPr>
-          <p:cNvPr id="9" name="Text 7"/>
+          <p:cNvPr id="4" name="Text 2"/>
           <p:cNvSpPr/>
           <p:nvPr/>
         </p:nvSpPr>
         <p:spPr>
           <a:xfrm>
-            <a:off x="274320" y="1783080"/>
-            <a:ext cx="1280160" cy="502920"/>
-          </a:xfrm>
-          <a:prstGeom prst="rect">
-            <a:avLst/>
-          </a:prstGeom>
-          <a:noFill/>
-          <a:ln/>
-        </p:spPr>
-        <p:txBody>
-          <a:bodyPr wrap="square" lIns="0" tIns="0" rIns="0" bIns="0" rtlCol="0" anchor="b"/>
-          <a:lstStyle/>
-          <a:p>
-            <a:pPr algn="ctr" indent="0" marL="0">
-              <a:buNone/>
-            </a:pPr>
-            <a:r>
-              <a:rPr lang="en-US" sz="850" dirty="0">
-                <a:solidFill>
-                  <a:srgbClr val="404040"/>
-                </a:solidFill>
-                <a:latin typeface="Calibri" pitchFamily="34" charset="0"/>
-                <a:ea typeface="Calibri" pitchFamily="34" charset="-122"/>
-                <a:cs typeface="Calibri" pitchFamily="34" charset="-120"/>
-              </a:rPr>
-              <a:t>National Hydrogen</a:t>
-            </a:r>
-            <a:endParaRPr lang="en-US" sz="850" dirty="0"/>
-          </a:p>
-          <a:p>
-            <a:pPr algn="ctr" indent="0" marL="0">
-              <a:buNone/>
-            </a:pPr>
-            <a:r>
-              <a:rPr lang="en-US" sz="850" dirty="0">
-                <a:solidFill>
-                  <a:srgbClr val="404040"/>
-                </a:solidFill>
-                <a:latin typeface="Calibri" pitchFamily="34" charset="0"/>
-                <a:ea typeface="Calibri" pitchFamily="34" charset="-122"/>
-                <a:cs typeface="Calibri" pitchFamily="34" charset="-120"/>
-              </a:rPr>
-              <a:t>Strategy published</a:t>
-            </a:r>
-            <a:endParaRPr lang="en-US" sz="850" dirty="0"/>
-          </a:p>
-        </p:txBody>
-      </p:sp>
-      <p:sp>
-        <p:nvSpPr>
-          <p:cNvPr id="10" name="Shape 8"/>
-          <p:cNvSpPr/>
-          <p:nvPr/>
-        </p:nvSpPr>
-        <p:spPr>
-          <a:xfrm>
-            <a:off x="2807208" y="2532888"/>
-            <a:ext cx="237744" cy="237744"/>
-          </a:xfrm>
-          <a:prstGeom prst="ellipse">
-            <a:avLst/>
-          </a:prstGeom>
-          <a:solidFill>
-            <a:srgbClr val="0C2340"/>
-          </a:solidFill>
-          <a:ln/>
-        </p:spPr>
-      </p:sp>
-      <p:sp>
-        <p:nvSpPr>
-          <p:cNvPr id="11" name="Text 9"/>
-          <p:cNvSpPr/>
-          <p:nvPr/>
-        </p:nvSpPr>
-        <p:spPr>
-          <a:xfrm>
-            <a:off x="2715768" y="2514600"/>
-            <a:ext cx="420624" cy="274320"/>
+            <a:off x="457200" y="914400"/>
+            <a:ext cx="3657600" cy="182880"/>
           </a:xfrm>
           <a:prstGeom prst="rect">
             <a:avLst/>
@@ -1195,654 +981,46 @@
           <a:bodyPr wrap="square" lIns="0" tIns="0" rIns="0" bIns="0" rtlCol="0" anchor="ctr"/>
           <a:lstStyle/>
           <a:p>
-            <a:pPr algn="ctr" indent="0" marL="0">
+            <a:pPr indent="0" marL="0">
               <a:buNone/>
             </a:pPr>
             <a:r>
-              <a:rPr lang="en-US" sz="750" b="1" dirty="0">
+              <a:rPr lang="en-US" sz="1000" dirty="0">
                 <a:solidFill>
-                  <a:srgbClr val="FFFFFF"/>
+                  <a:srgbClr val="666666"/>
                 </a:solidFill>
                 <a:latin typeface="Calibri" pitchFamily="34" charset="0"/>
                 <a:ea typeface="Calibri" pitchFamily="34" charset="-122"/>
                 <a:cs typeface="Calibri" pitchFamily="34" charset="-120"/>
               </a:rPr>
-              <a:t>2022</a:t>
+              <a:t>EV market comparison by region, 2024</a:t>
             </a:r>
-            <a:endParaRPr lang="en-US" sz="750" dirty="0"/>
+            <a:endParaRPr lang="en-US" sz="1000" dirty="0"/>
           </a:p>
         </p:txBody>
       </p:sp>
       <p:sp>
         <p:nvSpPr>
-          <p:cNvPr id="12" name="Shape 10"/>
+          <p:cNvPr id="5" name="Shape 3"/>
           <p:cNvSpPr/>
           <p:nvPr/>
         </p:nvSpPr>
         <p:spPr>
           <a:xfrm>
-            <a:off x="2926080" y="2788920"/>
-            <a:ext cx="0" cy="137160"/>
+            <a:off x="457200" y="1143000"/>
+            <a:ext cx="8229600" cy="0"/>
           </a:xfrm>
           <a:prstGeom prst="line">
             <a:avLst/>
           </a:prstGeom>
           <a:noFill/>
-          <a:ln w="9525">
+          <a:ln w="25400">
             <a:solidFill>
-              <a:srgbClr val="0C2340"/>
+              <a:srgbClr val="1B3A5C"/>
             </a:solidFill>
             <a:prstDash val="solid"/>
           </a:ln>
         </p:spPr>
-      </p:sp>
-      <p:sp>
-        <p:nvSpPr>
-          <p:cNvPr id="13" name="Text 11"/>
-          <p:cNvSpPr/>
-          <p:nvPr/>
-        </p:nvSpPr>
-        <p:spPr>
-          <a:xfrm>
-            <a:off x="2286000" y="2926080"/>
-            <a:ext cx="1280160" cy="502920"/>
-          </a:xfrm>
-          <a:prstGeom prst="rect">
-            <a:avLst/>
-          </a:prstGeom>
-          <a:noFill/>
-          <a:ln/>
-        </p:spPr>
-        <p:txBody>
-          <a:bodyPr wrap="square" lIns="0" tIns="0" rIns="0" bIns="0" rtlCol="0" anchor="t"/>
-          <a:lstStyle/>
-          <a:p>
-            <a:pPr algn="ctr" indent="0" marL="0">
-              <a:buNone/>
-            </a:pPr>
-            <a:r>
-              <a:rPr lang="en-US" sz="850" dirty="0">
-                <a:solidFill>
-                  <a:srgbClr val="404040"/>
-                </a:solidFill>
-                <a:latin typeface="Calibri" pitchFamily="34" charset="0"/>
-                <a:ea typeface="Calibri" pitchFamily="34" charset="-122"/>
-                <a:cs typeface="Calibri" pitchFamily="34" charset="-120"/>
-              </a:rPr>
-              <a:t>REPowerEU plan</a:t>
-            </a:r>
-            <a:endParaRPr lang="en-US" sz="850" dirty="0"/>
-          </a:p>
-          <a:p>
-            <a:pPr algn="ctr" indent="0" marL="0">
-              <a:buNone/>
-            </a:pPr>
-            <a:r>
-              <a:rPr lang="en-US" sz="850" dirty="0">
-                <a:solidFill>
-                  <a:srgbClr val="404040"/>
-                </a:solidFill>
-                <a:latin typeface="Calibri" pitchFamily="34" charset="0"/>
-                <a:ea typeface="Calibri" pitchFamily="34" charset="-122"/>
-                <a:cs typeface="Calibri" pitchFamily="34" charset="-120"/>
-              </a:rPr>
-              <a:t>accelerates ambitions</a:t>
-            </a:r>
-            <a:endParaRPr lang="en-US" sz="850" dirty="0"/>
-          </a:p>
-        </p:txBody>
-      </p:sp>
-      <p:sp>
-        <p:nvSpPr>
-          <p:cNvPr id="14" name="Shape 12"/>
-          <p:cNvSpPr/>
-          <p:nvPr/>
-        </p:nvSpPr>
-        <p:spPr>
-          <a:xfrm>
-            <a:off x="4818888" y="2532888"/>
-            <a:ext cx="237744" cy="237744"/>
-          </a:xfrm>
-          <a:prstGeom prst="ellipse">
-            <a:avLst/>
-          </a:prstGeom>
-          <a:solidFill>
-            <a:srgbClr val="0C2340"/>
-          </a:solidFill>
-          <a:ln/>
-        </p:spPr>
-      </p:sp>
-      <p:sp>
-        <p:nvSpPr>
-          <p:cNvPr id="15" name="Text 13"/>
-          <p:cNvSpPr/>
-          <p:nvPr/>
-        </p:nvSpPr>
-        <p:spPr>
-          <a:xfrm>
-            <a:off x="4727448" y="2514600"/>
-            <a:ext cx="420624" cy="274320"/>
-          </a:xfrm>
-          <a:prstGeom prst="rect">
-            <a:avLst/>
-          </a:prstGeom>
-          <a:noFill/>
-          <a:ln/>
-        </p:spPr>
-        <p:txBody>
-          <a:bodyPr wrap="square" lIns="0" tIns="0" rIns="0" bIns="0" rtlCol="0" anchor="ctr"/>
-          <a:lstStyle/>
-          <a:p>
-            <a:pPr algn="ctr" indent="0" marL="0">
-              <a:buNone/>
-            </a:pPr>
-            <a:r>
-              <a:rPr lang="en-US" sz="750" b="1" dirty="0">
-                <a:solidFill>
-                  <a:srgbClr val="FFFFFF"/>
-                </a:solidFill>
-                <a:latin typeface="Calibri" pitchFamily="34" charset="0"/>
-                <a:ea typeface="Calibri" pitchFamily="34" charset="-122"/>
-                <a:cs typeface="Calibri" pitchFamily="34" charset="-120"/>
-              </a:rPr>
-              <a:t>2025</a:t>
-            </a:r>
-            <a:endParaRPr lang="en-US" sz="750" dirty="0"/>
-          </a:p>
-        </p:txBody>
-      </p:sp>
-      <p:sp>
-        <p:nvSpPr>
-          <p:cNvPr id="16" name="Shape 14"/>
-          <p:cNvSpPr/>
-          <p:nvPr/>
-        </p:nvSpPr>
-        <p:spPr>
-          <a:xfrm>
-            <a:off x="4937760" y="2377440"/>
-            <a:ext cx="0" cy="137160"/>
-          </a:xfrm>
-          <a:prstGeom prst="line">
-            <a:avLst/>
-          </a:prstGeom>
-          <a:noFill/>
-          <a:ln w="9525">
-            <a:solidFill>
-              <a:srgbClr val="0C2340"/>
-            </a:solidFill>
-            <a:prstDash val="solid"/>
-          </a:ln>
-        </p:spPr>
-      </p:sp>
-      <p:sp>
-        <p:nvSpPr>
-          <p:cNvPr id="17" name="Text 15"/>
-          <p:cNvSpPr/>
-          <p:nvPr/>
-        </p:nvSpPr>
-        <p:spPr>
-          <a:xfrm>
-            <a:off x="4297680" y="1783080"/>
-            <a:ext cx="1280160" cy="502920"/>
-          </a:xfrm>
-          <a:prstGeom prst="rect">
-            <a:avLst/>
-          </a:prstGeom>
-          <a:noFill/>
-          <a:ln/>
-        </p:spPr>
-        <p:txBody>
-          <a:bodyPr wrap="square" lIns="0" tIns="0" rIns="0" bIns="0" rtlCol="0" anchor="b"/>
-          <a:lstStyle/>
-          <a:p>
-            <a:pPr algn="ctr" indent="0" marL="0">
-              <a:buNone/>
-            </a:pPr>
-            <a:r>
-              <a:rPr lang="en-US" sz="850" dirty="0">
-                <a:solidFill>
-                  <a:srgbClr val="404040"/>
-                </a:solidFill>
-                <a:latin typeface="Calibri" pitchFamily="34" charset="0"/>
-                <a:ea typeface="Calibri" pitchFamily="34" charset="-122"/>
-                <a:cs typeface="Calibri" pitchFamily="34" charset="-120"/>
-              </a:rPr>
-              <a:t>First green H2</a:t>
-            </a:r>
-            <a:endParaRPr lang="en-US" sz="850" dirty="0"/>
-          </a:p>
-          <a:p>
-            <a:pPr algn="ctr" indent="0" marL="0">
-              <a:buNone/>
-            </a:pPr>
-            <a:r>
-              <a:rPr lang="en-US" sz="850" dirty="0">
-                <a:solidFill>
-                  <a:srgbClr val="404040"/>
-                </a:solidFill>
-                <a:latin typeface="Calibri" pitchFamily="34" charset="0"/>
-                <a:ea typeface="Calibri" pitchFamily="34" charset="-122"/>
-                <a:cs typeface="Calibri" pitchFamily="34" charset="-120"/>
-              </a:rPr>
-              <a:t>hubs operational</a:t>
-            </a:r>
-            <a:endParaRPr lang="en-US" sz="850" dirty="0"/>
-          </a:p>
-        </p:txBody>
-      </p:sp>
-      <p:sp>
-        <p:nvSpPr>
-          <p:cNvPr id="18" name="Shape 16"/>
-          <p:cNvSpPr/>
-          <p:nvPr/>
-        </p:nvSpPr>
-        <p:spPr>
-          <a:xfrm>
-            <a:off x="6830568" y="2532888"/>
-            <a:ext cx="237744" cy="237744"/>
-          </a:xfrm>
-          <a:prstGeom prst="ellipse">
-            <a:avLst/>
-          </a:prstGeom>
-          <a:solidFill>
-            <a:srgbClr val="0C2340"/>
-          </a:solidFill>
-          <a:ln/>
-        </p:spPr>
-      </p:sp>
-      <p:sp>
-        <p:nvSpPr>
-          <p:cNvPr id="19" name="Text 17"/>
-          <p:cNvSpPr/>
-          <p:nvPr/>
-        </p:nvSpPr>
-        <p:spPr>
-          <a:xfrm>
-            <a:off x="6739128" y="2514600"/>
-            <a:ext cx="420624" cy="274320"/>
-          </a:xfrm>
-          <a:prstGeom prst="rect">
-            <a:avLst/>
-          </a:prstGeom>
-          <a:noFill/>
-          <a:ln/>
-        </p:spPr>
-        <p:txBody>
-          <a:bodyPr wrap="square" lIns="0" tIns="0" rIns="0" bIns="0" rtlCol="0" anchor="ctr"/>
-          <a:lstStyle/>
-          <a:p>
-            <a:pPr algn="ctr" indent="0" marL="0">
-              <a:buNone/>
-            </a:pPr>
-            <a:r>
-              <a:rPr lang="en-US" sz="750" b="1" dirty="0">
-                <a:solidFill>
-                  <a:srgbClr val="FFFFFF"/>
-                </a:solidFill>
-                <a:latin typeface="Calibri" pitchFamily="34" charset="0"/>
-                <a:ea typeface="Calibri" pitchFamily="34" charset="-122"/>
-                <a:cs typeface="Calibri" pitchFamily="34" charset="-120"/>
-              </a:rPr>
-              <a:t>2028</a:t>
-            </a:r>
-            <a:endParaRPr lang="en-US" sz="750" dirty="0"/>
-          </a:p>
-        </p:txBody>
-      </p:sp>
-      <p:sp>
-        <p:nvSpPr>
-          <p:cNvPr id="20" name="Shape 18"/>
-          <p:cNvSpPr/>
-          <p:nvPr/>
-        </p:nvSpPr>
-        <p:spPr>
-          <a:xfrm>
-            <a:off x="6949440" y="2788920"/>
-            <a:ext cx="0" cy="137160"/>
-          </a:xfrm>
-          <a:prstGeom prst="line">
-            <a:avLst/>
-          </a:prstGeom>
-          <a:noFill/>
-          <a:ln w="9525">
-            <a:solidFill>
-              <a:srgbClr val="0C2340"/>
-            </a:solidFill>
-            <a:prstDash val="solid"/>
-          </a:ln>
-        </p:spPr>
-      </p:sp>
-      <p:sp>
-        <p:nvSpPr>
-          <p:cNvPr id="21" name="Text 19"/>
-          <p:cNvSpPr/>
-          <p:nvPr/>
-        </p:nvSpPr>
-        <p:spPr>
-          <a:xfrm>
-            <a:off x="6309360" y="2926080"/>
-            <a:ext cx="1280160" cy="502920"/>
-          </a:xfrm>
-          <a:prstGeom prst="rect">
-            <a:avLst/>
-          </a:prstGeom>
-          <a:noFill/>
-          <a:ln/>
-        </p:spPr>
-        <p:txBody>
-          <a:bodyPr wrap="square" lIns="0" tIns="0" rIns="0" bIns="0" rtlCol="0" anchor="t"/>
-          <a:lstStyle/>
-          <a:p>
-            <a:pPr algn="ctr" indent="0" marL="0">
-              <a:buNone/>
-            </a:pPr>
-            <a:r>
-              <a:rPr lang="en-US" sz="850" dirty="0">
-                <a:solidFill>
-                  <a:srgbClr val="404040"/>
-                </a:solidFill>
-                <a:latin typeface="Calibri" pitchFamily="34" charset="0"/>
-                <a:ea typeface="Calibri" pitchFamily="34" charset="-122"/>
-                <a:cs typeface="Calibri" pitchFamily="34" charset="-120"/>
-              </a:rPr>
-              <a:t>HyNetwork backbone</a:t>
-            </a:r>
-            <a:endParaRPr lang="en-US" sz="850" dirty="0"/>
-          </a:p>
-          <a:p>
-            <a:pPr algn="ctr" indent="0" marL="0">
-              <a:buNone/>
-            </a:pPr>
-            <a:r>
-              <a:rPr lang="en-US" sz="850" dirty="0">
-                <a:solidFill>
-                  <a:srgbClr val="404040"/>
-                </a:solidFill>
-                <a:latin typeface="Calibri" pitchFamily="34" charset="0"/>
-                <a:ea typeface="Calibri" pitchFamily="34" charset="-122"/>
-                <a:cs typeface="Calibri" pitchFamily="34" charset="-120"/>
-              </a:rPr>
-              <a:t>pipeline live</a:t>
-            </a:r>
-            <a:endParaRPr lang="en-US" sz="850" dirty="0"/>
-          </a:p>
-        </p:txBody>
-      </p:sp>
-      <p:sp>
-        <p:nvSpPr>
-          <p:cNvPr id="22" name="Shape 20"/>
-          <p:cNvSpPr/>
-          <p:nvPr/>
-        </p:nvSpPr>
-        <p:spPr>
-          <a:xfrm>
-            <a:off x="8842248" y="2532888"/>
-            <a:ext cx="237744" cy="237744"/>
-          </a:xfrm>
-          <a:prstGeom prst="ellipse">
-            <a:avLst/>
-          </a:prstGeom>
-          <a:solidFill>
-            <a:srgbClr val="0C2340"/>
-          </a:solidFill>
-          <a:ln/>
-        </p:spPr>
-      </p:sp>
-      <p:sp>
-        <p:nvSpPr>
-          <p:cNvPr id="23" name="Text 21"/>
-          <p:cNvSpPr/>
-          <p:nvPr/>
-        </p:nvSpPr>
-        <p:spPr>
-          <a:xfrm>
-            <a:off x="8750808" y="2514600"/>
-            <a:ext cx="420624" cy="274320"/>
-          </a:xfrm>
-          <a:prstGeom prst="rect">
-            <a:avLst/>
-          </a:prstGeom>
-          <a:noFill/>
-          <a:ln/>
-        </p:spPr>
-        <p:txBody>
-          <a:bodyPr wrap="square" lIns="0" tIns="0" rIns="0" bIns="0" rtlCol="0" anchor="ctr"/>
-          <a:lstStyle/>
-          <a:p>
-            <a:pPr algn="ctr" indent="0" marL="0">
-              <a:buNone/>
-            </a:pPr>
-            <a:r>
-              <a:rPr lang="en-US" sz="750" b="1" dirty="0">
-                <a:solidFill>
-                  <a:srgbClr val="FFFFFF"/>
-                </a:solidFill>
-                <a:latin typeface="Calibri" pitchFamily="34" charset="0"/>
-                <a:ea typeface="Calibri" pitchFamily="34" charset="-122"/>
-                <a:cs typeface="Calibri" pitchFamily="34" charset="-120"/>
-              </a:rPr>
-              <a:t>2030</a:t>
-            </a:r>
-            <a:endParaRPr lang="en-US" sz="750" dirty="0"/>
-          </a:p>
-        </p:txBody>
-      </p:sp>
-      <p:sp>
-        <p:nvSpPr>
-          <p:cNvPr id="24" name="Shape 22"/>
-          <p:cNvSpPr/>
-          <p:nvPr/>
-        </p:nvSpPr>
-        <p:spPr>
-          <a:xfrm>
-            <a:off x="8961120" y="2377440"/>
-            <a:ext cx="0" cy="137160"/>
-          </a:xfrm>
-          <a:prstGeom prst="line">
-            <a:avLst/>
-          </a:prstGeom>
-          <a:noFill/>
-          <a:ln w="9525">
-            <a:solidFill>
-              <a:srgbClr val="0C2340"/>
-            </a:solidFill>
-            <a:prstDash val="solid"/>
-          </a:ln>
-        </p:spPr>
-      </p:sp>
-      <p:sp>
-        <p:nvSpPr>
-          <p:cNvPr id="25" name="Text 23"/>
-          <p:cNvSpPr/>
-          <p:nvPr/>
-        </p:nvSpPr>
-        <p:spPr>
-          <a:xfrm>
-            <a:off x="8321040" y="1783080"/>
-            <a:ext cx="1280160" cy="502920"/>
-          </a:xfrm>
-          <a:prstGeom prst="rect">
-            <a:avLst/>
-          </a:prstGeom>
-          <a:noFill/>
-          <a:ln/>
-        </p:spPr>
-        <p:txBody>
-          <a:bodyPr wrap="square" lIns="0" tIns="0" rIns="0" bIns="0" rtlCol="0" anchor="b"/>
-          <a:lstStyle/>
-          <a:p>
-            <a:pPr algn="ctr" indent="0" marL="0">
-              <a:buNone/>
-            </a:pPr>
-            <a:r>
-              <a:rPr lang="en-US" sz="850" dirty="0">
-                <a:solidFill>
-                  <a:srgbClr val="404040"/>
-                </a:solidFill>
-                <a:latin typeface="Calibri" pitchFamily="34" charset="0"/>
-                <a:ea typeface="Calibri" pitchFamily="34" charset="-122"/>
-                <a:cs typeface="Calibri" pitchFamily="34" charset="-120"/>
-              </a:rPr>
-              <a:t>Scale-up phase</a:t>
-            </a:r>
-            <a:endParaRPr lang="en-US" sz="850" dirty="0"/>
-          </a:p>
-          <a:p>
-            <a:pPr algn="ctr" indent="0" marL="0">
-              <a:buNone/>
-            </a:pPr>
-            <a:r>
-              <a:rPr lang="en-US" sz="850" dirty="0">
-                <a:solidFill>
-                  <a:srgbClr val="404040"/>
-                </a:solidFill>
-                <a:latin typeface="Calibri" pitchFamily="34" charset="0"/>
-                <a:ea typeface="Calibri" pitchFamily="34" charset="-122"/>
-                <a:cs typeface="Calibri" pitchFamily="34" charset="-120"/>
-              </a:rPr>
-              <a:t>complete</a:t>
-            </a:r>
-            <a:endParaRPr lang="en-US" sz="850" dirty="0"/>
-          </a:p>
-        </p:txBody>
-      </p:sp>
-      <p:sp>
-        <p:nvSpPr>
-          <p:cNvPr id="26" name="Shape 24"/>
-          <p:cNvSpPr/>
-          <p:nvPr/>
-        </p:nvSpPr>
-        <p:spPr>
-          <a:xfrm>
-            <a:off x="10853928" y="2532888"/>
-            <a:ext cx="237744" cy="237744"/>
-          </a:xfrm>
-          <a:prstGeom prst="ellipse">
-            <a:avLst/>
-          </a:prstGeom>
-          <a:solidFill>
-            <a:srgbClr val="0C2340"/>
-          </a:solidFill>
-          <a:ln/>
-        </p:spPr>
-      </p:sp>
-      <p:sp>
-        <p:nvSpPr>
-          <p:cNvPr id="27" name="Text 25"/>
-          <p:cNvSpPr/>
-          <p:nvPr/>
-        </p:nvSpPr>
-        <p:spPr>
-          <a:xfrm>
-            <a:off x="10762488" y="2514600"/>
-            <a:ext cx="420624" cy="274320"/>
-          </a:xfrm>
-          <a:prstGeom prst="rect">
-            <a:avLst/>
-          </a:prstGeom>
-          <a:noFill/>
-          <a:ln/>
-        </p:spPr>
-        <p:txBody>
-          <a:bodyPr wrap="square" lIns="0" tIns="0" rIns="0" bIns="0" rtlCol="0" anchor="ctr"/>
-          <a:lstStyle/>
-          <a:p>
-            <a:pPr algn="ctr" indent="0" marL="0">
-              <a:buNone/>
-            </a:pPr>
-            <a:r>
-              <a:rPr lang="en-US" sz="750" b="1" dirty="0">
-                <a:solidFill>
-                  <a:srgbClr val="FFFFFF"/>
-                </a:solidFill>
-                <a:latin typeface="Calibri" pitchFamily="34" charset="0"/>
-                <a:ea typeface="Calibri" pitchFamily="34" charset="-122"/>
-                <a:cs typeface="Calibri" pitchFamily="34" charset="-120"/>
-              </a:rPr>
-              <a:t>2035</a:t>
-            </a:r>
-            <a:endParaRPr lang="en-US" sz="750" dirty="0"/>
-          </a:p>
-        </p:txBody>
-      </p:sp>
-      <p:sp>
-        <p:nvSpPr>
-          <p:cNvPr id="28" name="Shape 26"/>
-          <p:cNvSpPr/>
-          <p:nvPr/>
-        </p:nvSpPr>
-        <p:spPr>
-          <a:xfrm>
-            <a:off x="10972800" y="2788920"/>
-            <a:ext cx="0" cy="137160"/>
-          </a:xfrm>
-          <a:prstGeom prst="line">
-            <a:avLst/>
-          </a:prstGeom>
-          <a:noFill/>
-          <a:ln w="9525">
-            <a:solidFill>
-              <a:srgbClr val="0C2340"/>
-            </a:solidFill>
-            <a:prstDash val="solid"/>
-          </a:ln>
-        </p:spPr>
-      </p:sp>
-      <p:sp>
-        <p:nvSpPr>
-          <p:cNvPr id="29" name="Text 27"/>
-          <p:cNvSpPr/>
-          <p:nvPr/>
-        </p:nvSpPr>
-        <p:spPr>
-          <a:xfrm>
-            <a:off x="10332720" y="2926080"/>
-            <a:ext cx="1280160" cy="502920"/>
-          </a:xfrm>
-          <a:prstGeom prst="rect">
-            <a:avLst/>
-          </a:prstGeom>
-          <a:noFill/>
-          <a:ln/>
-        </p:spPr>
-        <p:txBody>
-          <a:bodyPr wrap="square" lIns="0" tIns="0" rIns="0" bIns="0" rtlCol="0" anchor="t"/>
-          <a:lstStyle/>
-          <a:p>
-            <a:pPr algn="ctr" indent="0" marL="0">
-              <a:buNone/>
-            </a:pPr>
-            <a:r>
-              <a:rPr lang="en-US" sz="850" dirty="0">
-                <a:solidFill>
-                  <a:srgbClr val="404040"/>
-                </a:solidFill>
-                <a:latin typeface="Calibri" pitchFamily="34" charset="0"/>
-                <a:ea typeface="Calibri" pitchFamily="34" charset="-122"/>
-                <a:cs typeface="Calibri" pitchFamily="34" charset="-120"/>
-              </a:rPr>
-              <a:t>EU hydrogen corridor</a:t>
-            </a:r>
-            <a:endParaRPr lang="en-US" sz="850" dirty="0"/>
-          </a:p>
-          <a:p>
-            <a:pPr algn="ctr" indent="0" marL="0">
-              <a:buNone/>
-            </a:pPr>
-            <a:r>
-              <a:rPr lang="en-US" sz="850" dirty="0">
-                <a:solidFill>
-                  <a:srgbClr val="404040"/>
-                </a:solidFill>
-                <a:latin typeface="Calibri" pitchFamily="34" charset="0"/>
-                <a:ea typeface="Calibri" pitchFamily="34" charset="-122"/>
-                <a:cs typeface="Calibri" pitchFamily="34" charset="-120"/>
-              </a:rPr>
-              <a:t>integration</a:t>
-            </a:r>
-            <a:endParaRPr lang="en-US" sz="850" dirty="0"/>
-          </a:p>
-        </p:txBody>
       </p:sp>
       <p:graphicFrame>
         <p:nvGraphicFramePr>
@@ -1859,20 +1037,18 @@
           </p:nvPr>
         </p:nvGraphicFramePr>
         <p:xfrm>
-          <a:off x="457200" y="3566160"/>
-          <a:ext cx="11274552" cy="914400"/>
+          <a:off x="457200" y="1152144"/>
+          <a:ext cx="8229600" cy="2926080"/>
         </p:xfrm>
         <a:graphic>
           <a:graphicData uri="http://schemas.openxmlformats.org/drawingml/2006/table">
             <a:tbl>
               <a:tblPr/>
               <a:tblGrid>
-                <a:gridCol w="2130552"/>
-                <a:gridCol w="1828800"/>
-                <a:gridCol w="1828800"/>
-                <a:gridCol w="1828800"/>
-                <a:gridCol w="1828800"/>
-                <a:gridCol w="1828800"/>
+                <a:gridCol w="1280160"/>
+                <a:gridCol w="2331720"/>
+                <a:gridCol w="2331720"/>
+                <a:gridCol w="2331720"/>
               </a:tblGrid>
               <a:tr h="274320">
                 <a:tc>
@@ -1880,64 +1056,52 @@
                     <a:bodyPr/>
                     <a:lstStyle/>
                     <a:p>
-                      <a:pPr algn="l" indent="0" marL="0">
-                        <a:buNone/>
-                      </a:pPr>
-                      <a:r>
-                        <a:rPr lang="en-US" sz="850" b="1" dirty="0">
-                          <a:solidFill>
-                            <a:srgbClr val="0C2340"/>
-                          </a:solidFill>
-                          <a:latin typeface="Calibri" pitchFamily="34" charset="0"/>
-                          <a:ea typeface="Calibri" pitchFamily="34" charset="-122"/>
-                          <a:cs typeface="Calibri" pitchFamily="34" charset="-120"/>
-                        </a:rPr>
-                        <a:t>Metric</a:t>
-                      </a:r>
-                      <a:endParaRPr lang="en-US" sz="850" dirty="0">
-                        <a:latin typeface="Calibri" charset="0"/>
-                        <a:ea typeface="Calibri" charset="0"/>
-                        <a:cs typeface="Calibri" charset="0"/>
-                      </a:endParaRPr>
+                      <a:pPr indent="0" marL="0">
+                        <a:buNone/>
+                      </a:pPr>
+                      <a:endParaRPr lang="en-US" sz="900" dirty="0"/>
                     </a:p>
                   </a:txBody>
-                  <a:tcPr marL="50800" marR="50800" marT="25400" marB="25400" anchor="ctr">
-                    <a:lnL w="0" cap="flat" cmpd="sng" algn="ctr">
-                      <a:solidFill>
-                        <a:srgbClr val="FFFFFF"/>
+                  <a:tcPr marL="91440" marR="91440" marT="45720" marB="45720">
+                    <a:lnL w="9525" cap="flat" cmpd="sng" algn="ctr">
+                      <a:solidFill>
+                        <a:srgbClr val="C0C0C0"/>
                       </a:solidFill>
                       <a:prstDash val="solid"/>
                       <a:round/>
                       <a:headEnd type="none" w="med" len="med"/>
                       <a:tailEnd type="none" w="med" len="med"/>
                     </a:lnL>
-                    <a:lnR w="0" cap="flat" cmpd="sng" algn="ctr">
-                      <a:solidFill>
-                        <a:srgbClr val="FFFFFF"/>
+                    <a:lnR w="9525" cap="flat" cmpd="sng" algn="ctr">
+                      <a:solidFill>
+                        <a:srgbClr val="C0C0C0"/>
                       </a:solidFill>
                       <a:prstDash val="solid"/>
                       <a:round/>
                       <a:headEnd type="none" w="med" len="med"/>
                       <a:tailEnd type="none" w="med" len="med"/>
                     </a:lnR>
-                    <a:lnT w="19050" cap="flat" cmpd="sng" algn="ctr">
-                      <a:solidFill>
-                        <a:srgbClr val="0C2340"/>
+                    <a:lnT w="9525" cap="flat" cmpd="sng" algn="ctr">
+                      <a:solidFill>
+                        <a:srgbClr val="C0C0C0"/>
                       </a:solidFill>
                       <a:prstDash val="solid"/>
                       <a:round/>
                       <a:headEnd type="none" w="med" len="med"/>
                       <a:tailEnd type="none" w="med" len="med"/>
                     </a:lnT>
-                    <a:lnB w="19050" cap="flat" cmpd="sng" algn="ctr">
-                      <a:solidFill>
-                        <a:srgbClr val="0C2340"/>
+                    <a:lnB w="9525" cap="flat" cmpd="sng" algn="ctr">
+                      <a:solidFill>
+                        <a:srgbClr val="C0C0C0"/>
                       </a:solidFill>
                       <a:prstDash val="solid"/>
                       <a:round/>
                       <a:headEnd type="none" w="med" len="med"/>
                       <a:tailEnd type="none" w="med" len="med"/>
                     </a:lnB>
+                    <a:solidFill>
+                      <a:srgbClr val="FFFFFF"/>
+                    </a:solidFill>
                   </a:tcPr>
                 </a:tc>
                 <a:tc>
@@ -1949,60 +1113,63 @@
                         <a:buNone/>
                       </a:pPr>
                       <a:r>
-                        <a:rPr lang="en-US" sz="850" b="1" dirty="0">
-                          <a:solidFill>
-                            <a:srgbClr val="0C2340"/>
-                          </a:solidFill>
-                          <a:latin typeface="Calibri" pitchFamily="34" charset="0"/>
-                          <a:ea typeface="Calibri" pitchFamily="34" charset="-122"/>
-                          <a:cs typeface="Calibri" pitchFamily="34" charset="-120"/>
-                        </a:rPr>
-                        <a:t>2020</a:t>
-                      </a:r>
-                      <a:endParaRPr lang="en-US" sz="850" dirty="0">
+                        <a:rPr lang="en-US" sz="1000" b="1" dirty="0">
+                          <a:solidFill>
+                            <a:srgbClr val="000000"/>
+                          </a:solidFill>
+                          <a:latin typeface="Calibri" pitchFamily="34" charset="0"/>
+                          <a:ea typeface="Calibri" pitchFamily="34" charset="-122"/>
+                          <a:cs typeface="Calibri" pitchFamily="34" charset="-120"/>
+                        </a:rPr>
+                        <a:t>China</a:t>
+                      </a:r>
+                      <a:endParaRPr lang="en-US" sz="1000" dirty="0">
                         <a:latin typeface="Calibri" charset="0"/>
                         <a:ea typeface="Calibri" charset="0"/>
                         <a:cs typeface="Calibri" charset="0"/>
                       </a:endParaRPr>
                     </a:p>
                   </a:txBody>
-                  <a:tcPr marL="50800" marR="50800" marT="25400" marB="25400" anchor="ctr">
-                    <a:lnL w="0" cap="flat" cmpd="sng" algn="ctr">
-                      <a:solidFill>
-                        <a:srgbClr val="FFFFFF"/>
+                  <a:tcPr marL="91440" marR="91440" marT="45720" marB="45720" anchor="ctr">
+                    <a:lnL w="9525" cap="flat" cmpd="sng" algn="ctr">
+                      <a:solidFill>
+                        <a:srgbClr val="C0C0C0"/>
                       </a:solidFill>
                       <a:prstDash val="solid"/>
                       <a:round/>
                       <a:headEnd type="none" w="med" len="med"/>
                       <a:tailEnd type="none" w="med" len="med"/>
                     </a:lnL>
-                    <a:lnR w="0" cap="flat" cmpd="sng" algn="ctr">
-                      <a:solidFill>
-                        <a:srgbClr val="FFFFFF"/>
+                    <a:lnR w="9525" cap="flat" cmpd="sng" algn="ctr">
+                      <a:solidFill>
+                        <a:srgbClr val="C0C0C0"/>
                       </a:solidFill>
                       <a:prstDash val="solid"/>
                       <a:round/>
                       <a:headEnd type="none" w="med" len="med"/>
                       <a:tailEnd type="none" w="med" len="med"/>
                     </a:lnR>
-                    <a:lnT w="19050" cap="flat" cmpd="sng" algn="ctr">
-                      <a:solidFill>
-                        <a:srgbClr val="0C2340"/>
+                    <a:lnT w="9525" cap="flat" cmpd="sng" algn="ctr">
+                      <a:solidFill>
+                        <a:srgbClr val="C0C0C0"/>
                       </a:solidFill>
                       <a:prstDash val="solid"/>
                       <a:round/>
                       <a:headEnd type="none" w="med" len="med"/>
                       <a:tailEnd type="none" w="med" len="med"/>
                     </a:lnT>
-                    <a:lnB w="19050" cap="flat" cmpd="sng" algn="ctr">
-                      <a:solidFill>
-                        <a:srgbClr val="0C2340"/>
+                    <a:lnB w="9525" cap="flat" cmpd="sng" algn="ctr">
+                      <a:solidFill>
+                        <a:srgbClr val="C0C0C0"/>
                       </a:solidFill>
                       <a:prstDash val="solid"/>
                       <a:round/>
                       <a:headEnd type="none" w="med" len="med"/>
                       <a:tailEnd type="none" w="med" len="med"/>
                     </a:lnB>
+                    <a:solidFill>
+                      <a:srgbClr val="FDE8E8"/>
+                    </a:solidFill>
                   </a:tcPr>
                 </a:tc>
                 <a:tc>
@@ -2014,60 +1181,63 @@
                         <a:buNone/>
                       </a:pPr>
                       <a:r>
-                        <a:rPr lang="en-US" sz="850" b="1" dirty="0">
-                          <a:solidFill>
-                            <a:srgbClr val="0C2340"/>
-                          </a:solidFill>
-                          <a:latin typeface="Calibri" pitchFamily="34" charset="0"/>
-                          <a:ea typeface="Calibri" pitchFamily="34" charset="-122"/>
-                          <a:cs typeface="Calibri" pitchFamily="34" charset="-120"/>
-                        </a:rPr>
-                        <a:t>2025</a:t>
-                      </a:r>
-                      <a:endParaRPr lang="en-US" sz="850" dirty="0">
+                        <a:rPr lang="en-US" sz="1000" b="1" dirty="0">
+                          <a:solidFill>
+                            <a:srgbClr val="000000"/>
+                          </a:solidFill>
+                          <a:latin typeface="Calibri" pitchFamily="34" charset="0"/>
+                          <a:ea typeface="Calibri" pitchFamily="34" charset="-122"/>
+                          <a:cs typeface="Calibri" pitchFamily="34" charset="-120"/>
+                        </a:rPr>
+                        <a:t>Europe</a:t>
+                      </a:r>
+                      <a:endParaRPr lang="en-US" sz="1000" dirty="0">
                         <a:latin typeface="Calibri" charset="0"/>
                         <a:ea typeface="Calibri" charset="0"/>
                         <a:cs typeface="Calibri" charset="0"/>
                       </a:endParaRPr>
                     </a:p>
                   </a:txBody>
-                  <a:tcPr marL="50800" marR="50800" marT="25400" marB="25400" anchor="ctr">
-                    <a:lnL w="0" cap="flat" cmpd="sng" algn="ctr">
-                      <a:solidFill>
-                        <a:srgbClr val="FFFFFF"/>
+                  <a:tcPr marL="91440" marR="91440" marT="45720" marB="45720" anchor="ctr">
+                    <a:lnL w="9525" cap="flat" cmpd="sng" algn="ctr">
+                      <a:solidFill>
+                        <a:srgbClr val="C0C0C0"/>
                       </a:solidFill>
                       <a:prstDash val="solid"/>
                       <a:round/>
                       <a:headEnd type="none" w="med" len="med"/>
                       <a:tailEnd type="none" w="med" len="med"/>
                     </a:lnL>
-                    <a:lnR w="0" cap="flat" cmpd="sng" algn="ctr">
-                      <a:solidFill>
-                        <a:srgbClr val="FFFFFF"/>
+                    <a:lnR w="9525" cap="flat" cmpd="sng" algn="ctr">
+                      <a:solidFill>
+                        <a:srgbClr val="C0C0C0"/>
                       </a:solidFill>
                       <a:prstDash val="solid"/>
                       <a:round/>
                       <a:headEnd type="none" w="med" len="med"/>
                       <a:tailEnd type="none" w="med" len="med"/>
                     </a:lnR>
-                    <a:lnT w="19050" cap="flat" cmpd="sng" algn="ctr">
-                      <a:solidFill>
-                        <a:srgbClr val="0C2340"/>
+                    <a:lnT w="9525" cap="flat" cmpd="sng" algn="ctr">
+                      <a:solidFill>
+                        <a:srgbClr val="C0C0C0"/>
                       </a:solidFill>
                       <a:prstDash val="solid"/>
                       <a:round/>
                       <a:headEnd type="none" w="med" len="med"/>
                       <a:tailEnd type="none" w="med" len="med"/>
                     </a:lnT>
-                    <a:lnB w="19050" cap="flat" cmpd="sng" algn="ctr">
-                      <a:solidFill>
-                        <a:srgbClr val="0C2340"/>
+                    <a:lnB w="9525" cap="flat" cmpd="sng" algn="ctr">
+                      <a:solidFill>
+                        <a:srgbClr val="C0C0C0"/>
                       </a:solidFill>
                       <a:prstDash val="solid"/>
                       <a:round/>
                       <a:headEnd type="none" w="med" len="med"/>
                       <a:tailEnd type="none" w="med" len="med"/>
                     </a:lnB>
+                    <a:solidFill>
+                      <a:srgbClr val="DCE9F5"/>
+                    </a:solidFill>
                   </a:tcPr>
                 </a:tc>
                 <a:tc>
@@ -2079,60 +1249,154 @@
                         <a:buNone/>
                       </a:pPr>
                       <a:r>
-                        <a:rPr lang="en-US" sz="850" b="1" dirty="0">
-                          <a:solidFill>
-                            <a:srgbClr val="0C2340"/>
-                          </a:solidFill>
-                          <a:latin typeface="Calibri" pitchFamily="34" charset="0"/>
-                          <a:ea typeface="Calibri" pitchFamily="34" charset="-122"/>
-                          <a:cs typeface="Calibri" pitchFamily="34" charset="-120"/>
-                        </a:rPr>
-                        <a:t>2028</a:t>
-                      </a:r>
-                      <a:endParaRPr lang="en-US" sz="850" dirty="0">
+                        <a:rPr lang="en-US" sz="1000" b="1" dirty="0">
+                          <a:solidFill>
+                            <a:srgbClr val="000000"/>
+                          </a:solidFill>
+                          <a:latin typeface="Calibri" pitchFamily="34" charset="0"/>
+                          <a:ea typeface="Calibri" pitchFamily="34" charset="-122"/>
+                          <a:cs typeface="Calibri" pitchFamily="34" charset="-120"/>
+                        </a:rPr>
+                        <a:t>United States</a:t>
+                      </a:r>
+                      <a:endParaRPr lang="en-US" sz="1000" dirty="0">
                         <a:latin typeface="Calibri" charset="0"/>
                         <a:ea typeface="Calibri" charset="0"/>
                         <a:cs typeface="Calibri" charset="0"/>
                       </a:endParaRPr>
                     </a:p>
                   </a:txBody>
-                  <a:tcPr marL="50800" marR="50800" marT="25400" marB="25400" anchor="ctr">
-                    <a:lnL w="0" cap="flat" cmpd="sng" algn="ctr">
-                      <a:solidFill>
-                        <a:srgbClr val="FFFFFF"/>
+                  <a:tcPr marL="91440" marR="91440" marT="45720" marB="45720" anchor="ctr">
+                    <a:lnL w="9525" cap="flat" cmpd="sng" algn="ctr">
+                      <a:solidFill>
+                        <a:srgbClr val="C0C0C0"/>
                       </a:solidFill>
                       <a:prstDash val="solid"/>
                       <a:round/>
                       <a:headEnd type="none" w="med" len="med"/>
                       <a:tailEnd type="none" w="med" len="med"/>
                     </a:lnL>
-                    <a:lnR w="0" cap="flat" cmpd="sng" algn="ctr">
-                      <a:solidFill>
-                        <a:srgbClr val="FFFFFF"/>
+                    <a:lnR w="9525" cap="flat" cmpd="sng" algn="ctr">
+                      <a:solidFill>
+                        <a:srgbClr val="C0C0C0"/>
                       </a:solidFill>
                       <a:prstDash val="solid"/>
                       <a:round/>
                       <a:headEnd type="none" w="med" len="med"/>
                       <a:tailEnd type="none" w="med" len="med"/>
                     </a:lnR>
-                    <a:lnT w="19050" cap="flat" cmpd="sng" algn="ctr">
-                      <a:solidFill>
-                        <a:srgbClr val="0C2340"/>
+                    <a:lnT w="9525" cap="flat" cmpd="sng" algn="ctr">
+                      <a:solidFill>
+                        <a:srgbClr val="C0C0C0"/>
                       </a:solidFill>
                       <a:prstDash val="solid"/>
                       <a:round/>
                       <a:headEnd type="none" w="med" len="med"/>
                       <a:tailEnd type="none" w="med" len="med"/>
                     </a:lnT>
-                    <a:lnB w="19050" cap="flat" cmpd="sng" algn="ctr">
-                      <a:solidFill>
-                        <a:srgbClr val="0C2340"/>
+                    <a:lnB w="9525" cap="flat" cmpd="sng" algn="ctr">
+                      <a:solidFill>
+                        <a:srgbClr val="C0C0C0"/>
                       </a:solidFill>
                       <a:prstDash val="solid"/>
                       <a:round/>
                       <a:headEnd type="none" w="med" len="med"/>
                       <a:tailEnd type="none" w="med" len="med"/>
                     </a:lnB>
+                    <a:solidFill>
+                      <a:srgbClr val="E8F6EF"/>
+                    </a:solidFill>
+                  </a:tcPr>
+                </a:tc>
+              </a:tr>
+              <a:tr h="365760">
+                <a:tc>
+                  <a:txBody>
+                    <a:bodyPr/>
+                    <a:lstStyle/>
+                    <a:p>
+                      <a:pPr indent="0" marL="0">
+                        <a:buNone/>
+                      </a:pPr>
+                      <a:r>
+                        <a:rPr lang="en-US" sz="900" b="1" dirty="0">
+                          <a:solidFill>
+                            <a:srgbClr val="000000"/>
+                          </a:solidFill>
+                          <a:latin typeface="Calibri" pitchFamily="34" charset="0"/>
+                          <a:ea typeface="Calibri" pitchFamily="34" charset="-122"/>
+                          <a:cs typeface="Calibri" pitchFamily="34" charset="-120"/>
+                        </a:rPr>
+                        <a:t>Market size</a:t>
+                      </a:r>
+                      <a:endParaRPr lang="en-US" sz="900" dirty="0">
+                        <a:latin typeface="Calibri" charset="0"/>
+                        <a:ea typeface="Calibri" charset="0"/>
+                        <a:cs typeface="Calibri" charset="0"/>
+                      </a:endParaRPr>
+                    </a:p>
+                    <a:p>
+                      <a:pPr indent="0" marL="0">
+                        <a:buNone/>
+                      </a:pPr>
+                      <a:r>
+                        <a:rPr lang="en-US" sz="900" b="1" dirty="0">
+                          <a:solidFill>
+                            <a:srgbClr val="000000"/>
+                          </a:solidFill>
+                          <a:latin typeface="Calibri" pitchFamily="34" charset="0"/>
+                          <a:ea typeface="Calibri" pitchFamily="34" charset="-122"/>
+                          <a:cs typeface="Calibri" pitchFamily="34" charset="-120"/>
+                        </a:rPr>
+                        <a:t>(2024)</a:t>
+                      </a:r>
+                      <a:endParaRPr lang="en-US" sz="900" dirty="0">
+                        <a:latin typeface="Calibri" charset="0"/>
+                        <a:ea typeface="Calibri" charset="0"/>
+                        <a:cs typeface="Calibri" charset="0"/>
+                      </a:endParaRPr>
+                    </a:p>
+                  </a:txBody>
+                  <a:tcPr marL="91440" marR="91440" marT="45720" marB="45720" anchor="ctr">
+                    <a:lnL w="9525" cap="flat" cmpd="sng" algn="ctr">
+                      <a:solidFill>
+                        <a:srgbClr val="C0C0C0"/>
+                      </a:solidFill>
+                      <a:prstDash val="solid"/>
+                      <a:round/>
+                      <a:headEnd type="none" w="med" len="med"/>
+                      <a:tailEnd type="none" w="med" len="med"/>
+                    </a:lnL>
+                    <a:lnR w="9525" cap="flat" cmpd="sng" algn="ctr">
+                      <a:solidFill>
+                        <a:srgbClr val="C0C0C0"/>
+                      </a:solidFill>
+                      <a:prstDash val="solid"/>
+                      <a:round/>
+                      <a:headEnd type="none" w="med" len="med"/>
+                      <a:tailEnd type="none" w="med" len="med"/>
+                    </a:lnR>
+                    <a:lnT w="9525" cap="flat" cmpd="sng" algn="ctr">
+                      <a:solidFill>
+                        <a:srgbClr val="C0C0C0"/>
+                      </a:solidFill>
+                      <a:prstDash val="solid"/>
+                      <a:round/>
+                      <a:headEnd type="none" w="med" len="med"/>
+                      <a:tailEnd type="none" w="med" len="med"/>
+                    </a:lnT>
+                    <a:lnB w="9525" cap="flat" cmpd="sng" algn="ctr">
+                      <a:solidFill>
+                        <a:srgbClr val="C0C0C0"/>
+                      </a:solidFill>
+                      <a:prstDash val="solid"/>
+                      <a:round/>
+                      <a:headEnd type="none" w="med" len="med"/>
+                      <a:tailEnd type="none" w="med" len="med"/>
+                    </a:lnB>
+                    <a:solidFill>
+                      <a:srgbClr val="FFFFFF"/>
+                    </a:solidFill>
                   </a:tcPr>
                 </a:tc>
                 <a:tc>
@@ -2140,64 +1404,88 @@
                     <a:bodyPr/>
                     <a:lstStyle/>
                     <a:p>
-                      <a:pPr algn="ctr" indent="0" marL="0">
-                        <a:buNone/>
-                      </a:pPr>
-                      <a:r>
-                        <a:rPr lang="en-US" sz="850" b="1" dirty="0">
-                          <a:solidFill>
-                            <a:srgbClr val="0C2340"/>
-                          </a:solidFill>
-                          <a:latin typeface="Calibri" pitchFamily="34" charset="0"/>
-                          <a:ea typeface="Calibri" pitchFamily="34" charset="-122"/>
-                          <a:cs typeface="Calibri" pitchFamily="34" charset="-120"/>
-                        </a:rPr>
-                        <a:t>2030</a:t>
-                      </a:r>
-                      <a:endParaRPr lang="en-US" sz="850" dirty="0">
+                      <a:pPr indent="0" marL="0">
+                        <a:buNone/>
+                      </a:pPr>
+                      <a:r>
+                        <a:rPr lang="en-US" sz="900" dirty="0">
+                          <a:solidFill>
+                            <a:srgbClr val="333333"/>
+                          </a:solidFill>
+                          <a:latin typeface="Calibri" pitchFamily="34" charset="0"/>
+                          <a:ea typeface="Calibri" pitchFamily="34" charset="-122"/>
+                          <a:cs typeface="Calibri" pitchFamily="34" charset="-120"/>
+                        </a:rPr>
+                        <a:t>~8.1M units sold</a:t>
+                      </a:r>
+                      <a:endParaRPr lang="en-US" sz="900" dirty="0">
+                        <a:latin typeface="Calibri" charset="0"/>
+                        <a:ea typeface="Calibri" charset="0"/>
+                        <a:cs typeface="Calibri" charset="0"/>
+                      </a:endParaRPr>
+                    </a:p>
+                    <a:p>
+                      <a:pPr indent="0" marL="0">
+                        <a:buNone/>
+                      </a:pPr>
+                      <a:r>
+                        <a:rPr lang="en-US" sz="900" dirty="0">
+                          <a:solidFill>
+                            <a:srgbClr val="333333"/>
+                          </a:solidFill>
+                          <a:latin typeface="Calibri" pitchFamily="34" charset="0"/>
+                          <a:ea typeface="Calibri" pitchFamily="34" charset="-122"/>
+                          <a:cs typeface="Calibri" pitchFamily="34" charset="-120"/>
+                        </a:rPr>
+                        <a:t>(+25% YoY)</a:t>
+                      </a:r>
+                      <a:endParaRPr lang="en-US" sz="900" dirty="0">
                         <a:latin typeface="Calibri" charset="0"/>
                         <a:ea typeface="Calibri" charset="0"/>
                         <a:cs typeface="Calibri" charset="0"/>
                       </a:endParaRPr>
                     </a:p>
                   </a:txBody>
-                  <a:tcPr marL="50800" marR="50800" marT="25400" marB="25400" anchor="ctr">
-                    <a:lnL w="0" cap="flat" cmpd="sng" algn="ctr">
-                      <a:solidFill>
-                        <a:srgbClr val="FFFFFF"/>
+                  <a:tcPr marL="91440" marR="91440" marT="45720" marB="45720" anchor="ctr">
+                    <a:lnL w="9525" cap="flat" cmpd="sng" algn="ctr">
+                      <a:solidFill>
+                        <a:srgbClr val="C0C0C0"/>
                       </a:solidFill>
                       <a:prstDash val="solid"/>
                       <a:round/>
                       <a:headEnd type="none" w="med" len="med"/>
                       <a:tailEnd type="none" w="med" len="med"/>
                     </a:lnL>
-                    <a:lnR w="0" cap="flat" cmpd="sng" algn="ctr">
-                      <a:solidFill>
-                        <a:srgbClr val="FFFFFF"/>
+                    <a:lnR w="9525" cap="flat" cmpd="sng" algn="ctr">
+                      <a:solidFill>
+                        <a:srgbClr val="C0C0C0"/>
                       </a:solidFill>
                       <a:prstDash val="solid"/>
                       <a:round/>
                       <a:headEnd type="none" w="med" len="med"/>
                       <a:tailEnd type="none" w="med" len="med"/>
                     </a:lnR>
-                    <a:lnT w="19050" cap="flat" cmpd="sng" algn="ctr">
-                      <a:solidFill>
-                        <a:srgbClr val="0C2340"/>
+                    <a:lnT w="9525" cap="flat" cmpd="sng" algn="ctr">
+                      <a:solidFill>
+                        <a:srgbClr val="C0C0C0"/>
                       </a:solidFill>
                       <a:prstDash val="solid"/>
                       <a:round/>
                       <a:headEnd type="none" w="med" len="med"/>
                       <a:tailEnd type="none" w="med" len="med"/>
                     </a:lnT>
-                    <a:lnB w="19050" cap="flat" cmpd="sng" algn="ctr">
-                      <a:solidFill>
-                        <a:srgbClr val="0C2340"/>
+                    <a:lnB w="9525" cap="flat" cmpd="sng" algn="ctr">
+                      <a:solidFill>
+                        <a:srgbClr val="C0C0C0"/>
                       </a:solidFill>
                       <a:prstDash val="solid"/>
                       <a:round/>
                       <a:headEnd type="none" w="med" len="med"/>
                       <a:tailEnd type="none" w="med" len="med"/>
                     </a:lnB>
+                    <a:solidFill>
+                      <a:srgbClr val="FFFFFF"/>
+                    </a:solidFill>
                   </a:tcPr>
                 </a:tc>
                 <a:tc>
@@ -2205,131 +1493,88 @@
                     <a:bodyPr/>
                     <a:lstStyle/>
                     <a:p>
-                      <a:pPr algn="ctr" indent="0" marL="0">
-                        <a:buNone/>
-                      </a:pPr>
-                      <a:r>
-                        <a:rPr lang="en-US" sz="850" b="1" dirty="0">
-                          <a:solidFill>
-                            <a:srgbClr val="0C2340"/>
-                          </a:solidFill>
-                          <a:latin typeface="Calibri" pitchFamily="34" charset="0"/>
-                          <a:ea typeface="Calibri" pitchFamily="34" charset="-122"/>
-                          <a:cs typeface="Calibri" pitchFamily="34" charset="-120"/>
-                        </a:rPr>
-                        <a:t>2035</a:t>
-                      </a:r>
-                      <a:endParaRPr lang="en-US" sz="850" dirty="0">
+                      <a:pPr indent="0" marL="0">
+                        <a:buNone/>
+                      </a:pPr>
+                      <a:r>
+                        <a:rPr lang="en-US" sz="900" dirty="0">
+                          <a:solidFill>
+                            <a:srgbClr val="333333"/>
+                          </a:solidFill>
+                          <a:latin typeface="Calibri" pitchFamily="34" charset="0"/>
+                          <a:ea typeface="Calibri" pitchFamily="34" charset="-122"/>
+                          <a:cs typeface="Calibri" pitchFamily="34" charset="-120"/>
+                        </a:rPr>
+                        <a:t>~3.2M units sold</a:t>
+                      </a:r>
+                      <a:endParaRPr lang="en-US" sz="900" dirty="0">
+                        <a:latin typeface="Calibri" charset="0"/>
+                        <a:ea typeface="Calibri" charset="0"/>
+                        <a:cs typeface="Calibri" charset="0"/>
+                      </a:endParaRPr>
+                    </a:p>
+                    <a:p>
+                      <a:pPr indent="0" marL="0">
+                        <a:buNone/>
+                      </a:pPr>
+                      <a:r>
+                        <a:rPr lang="en-US" sz="900" dirty="0">
+                          <a:solidFill>
+                            <a:srgbClr val="333333"/>
+                          </a:solidFill>
+                          <a:latin typeface="Calibri" pitchFamily="34" charset="0"/>
+                          <a:ea typeface="Calibri" pitchFamily="34" charset="-122"/>
+                          <a:cs typeface="Calibri" pitchFamily="34" charset="-120"/>
+                        </a:rPr>
+                        <a:t>(+18% YoY)</a:t>
+                      </a:r>
+                      <a:endParaRPr lang="en-US" sz="900" dirty="0">
                         <a:latin typeface="Calibri" charset="0"/>
                         <a:ea typeface="Calibri" charset="0"/>
                         <a:cs typeface="Calibri" charset="0"/>
                       </a:endParaRPr>
                     </a:p>
                   </a:txBody>
-                  <a:tcPr marL="50800" marR="50800" marT="25400" marB="25400" anchor="ctr">
-                    <a:lnL w="0" cap="flat" cmpd="sng" algn="ctr">
-                      <a:solidFill>
-                        <a:srgbClr val="FFFFFF"/>
+                  <a:tcPr marL="91440" marR="91440" marT="45720" marB="45720" anchor="ctr">
+                    <a:lnL w="9525" cap="flat" cmpd="sng" algn="ctr">
+                      <a:solidFill>
+                        <a:srgbClr val="C0C0C0"/>
                       </a:solidFill>
                       <a:prstDash val="solid"/>
                       <a:round/>
                       <a:headEnd type="none" w="med" len="med"/>
                       <a:tailEnd type="none" w="med" len="med"/>
                     </a:lnL>
-                    <a:lnR w="0" cap="flat" cmpd="sng" algn="ctr">
-                      <a:solidFill>
-                        <a:srgbClr val="FFFFFF"/>
+                    <a:lnR w="9525" cap="flat" cmpd="sng" algn="ctr">
+                      <a:solidFill>
+                        <a:srgbClr val="C0C0C0"/>
                       </a:solidFill>
                       <a:prstDash val="solid"/>
                       <a:round/>
                       <a:headEnd type="none" w="med" len="med"/>
                       <a:tailEnd type="none" w="med" len="med"/>
                     </a:lnR>
-                    <a:lnT w="19050" cap="flat" cmpd="sng" algn="ctr">
-                      <a:solidFill>
-                        <a:srgbClr val="0C2340"/>
+                    <a:lnT w="9525" cap="flat" cmpd="sng" algn="ctr">
+                      <a:solidFill>
+                        <a:srgbClr val="C0C0C0"/>
                       </a:solidFill>
                       <a:prstDash val="solid"/>
                       <a:round/>
                       <a:headEnd type="none" w="med" len="med"/>
                       <a:tailEnd type="none" w="med" len="med"/>
                     </a:lnT>
-                    <a:lnB w="19050" cap="flat" cmpd="sng" algn="ctr">
-                      <a:solidFill>
-                        <a:srgbClr val="0C2340"/>
+                    <a:lnB w="9525" cap="flat" cmpd="sng" algn="ctr">
+                      <a:solidFill>
+                        <a:srgbClr val="C0C0C0"/>
                       </a:solidFill>
                       <a:prstDash val="solid"/>
                       <a:round/>
                       <a:headEnd type="none" w="med" len="med"/>
                       <a:tailEnd type="none" w="med" len="med"/>
                     </a:lnB>
-                  </a:tcPr>
-                </a:tc>
-              </a:tr>
-              <a:tr h="256032">
-                <a:tc>
-                  <a:txBody>
-                    <a:bodyPr/>
-                    <a:lstStyle/>
-                    <a:p>
-                      <a:pPr algn="l" indent="0" marL="0">
-                        <a:buNone/>
-                      </a:pPr>
-                      <a:r>
-                        <a:rPr lang="en-US" sz="850" b="1" dirty="0">
-                          <a:solidFill>
-                            <a:srgbClr val="333333"/>
-                          </a:solidFill>
-                          <a:latin typeface="Calibri" pitchFamily="34" charset="0"/>
-                          <a:ea typeface="Calibri" pitchFamily="34" charset="-122"/>
-                          <a:cs typeface="Calibri" pitchFamily="34" charset="-120"/>
-                        </a:rPr>
-                        <a:t>Electrolyzer capacity (GW)</a:t>
-                      </a:r>
-                      <a:endParaRPr lang="en-US" sz="850" dirty="0">
-                        <a:latin typeface="Calibri" charset="0"/>
-                        <a:ea typeface="Calibri" charset="0"/>
-                        <a:cs typeface="Calibri" charset="0"/>
-                      </a:endParaRPr>
-                    </a:p>
-                  </a:txBody>
-                  <a:tcPr marL="50800" marR="50800" marT="25400" marB="25400" anchor="ctr">
-                    <a:lnL w="0" cap="flat" cmpd="sng" algn="ctr">
-                      <a:solidFill>
-                        <a:srgbClr val="FFFFFF"/>
-                      </a:solidFill>
-                      <a:prstDash val="solid"/>
-                      <a:round/>
-                      <a:headEnd type="none" w="med" len="med"/>
-                      <a:tailEnd type="none" w="med" len="med"/>
-                    </a:lnL>
-                    <a:lnR w="0" cap="flat" cmpd="sng" algn="ctr">
-                      <a:solidFill>
-                        <a:srgbClr val="FFFFFF"/>
-                      </a:solidFill>
-                      <a:prstDash val="solid"/>
-                      <a:round/>
-                      <a:headEnd type="none" w="med" len="med"/>
-                      <a:tailEnd type="none" w="med" len="med"/>
-                    </a:lnR>
-                    <a:lnT w="0" cap="flat" cmpd="sng" algn="ctr">
-                      <a:solidFill>
-                        <a:srgbClr val="FFFFFF"/>
-                      </a:solidFill>
-                      <a:prstDash val="solid"/>
-                      <a:round/>
-                      <a:headEnd type="none" w="med" len="med"/>
-                      <a:tailEnd type="none" w="med" len="med"/>
-                    </a:lnT>
-                    <a:lnB w="6350" cap="flat" cmpd="sng" algn="ctr">
-                      <a:solidFill>
-                        <a:srgbClr val="E8E8E8"/>
-                      </a:solidFill>
-                      <a:prstDash val="solid"/>
-                      <a:round/>
-                      <a:headEnd type="none" w="med" len="med"/>
-                      <a:tailEnd type="none" w="med" len="med"/>
-                    </a:lnB>
+                    <a:solidFill>
+                      <a:srgbClr val="FFFFFF"/>
+                    </a:solidFill>
                   </a:tcPr>
                 </a:tc>
                 <a:tc>
@@ -2337,64 +1582,179 @@
                     <a:bodyPr/>
                     <a:lstStyle/>
                     <a:p>
-                      <a:pPr algn="ctr" indent="0" marL="0">
-                        <a:buNone/>
-                      </a:pPr>
-                      <a:r>
-                        <a:rPr lang="en-US" sz="800" dirty="0">
-                          <a:solidFill>
-                            <a:srgbClr val="404040"/>
-                          </a:solidFill>
-                          <a:latin typeface="Calibri" pitchFamily="34" charset="0"/>
-                          <a:ea typeface="Calibri" pitchFamily="34" charset="-122"/>
-                          <a:cs typeface="Calibri" pitchFamily="34" charset="-120"/>
-                        </a:rPr>
-                        <a:t>0.5</a:t>
-                      </a:r>
-                      <a:endParaRPr lang="en-US" sz="800" dirty="0">
+                      <a:pPr indent="0" marL="0">
+                        <a:buNone/>
+                      </a:pPr>
+                      <a:r>
+                        <a:rPr lang="en-US" sz="900" dirty="0">
+                          <a:solidFill>
+                            <a:srgbClr val="333333"/>
+                          </a:solidFill>
+                          <a:latin typeface="Calibri" pitchFamily="34" charset="0"/>
+                          <a:ea typeface="Calibri" pitchFamily="34" charset="-122"/>
+                          <a:cs typeface="Calibri" pitchFamily="34" charset="-120"/>
+                        </a:rPr>
+                        <a:t>~1.8M units sold</a:t>
+                      </a:r>
+                      <a:endParaRPr lang="en-US" sz="900" dirty="0">
+                        <a:latin typeface="Calibri" charset="0"/>
+                        <a:ea typeface="Calibri" charset="0"/>
+                        <a:cs typeface="Calibri" charset="0"/>
+                      </a:endParaRPr>
+                    </a:p>
+                    <a:p>
+                      <a:pPr indent="0" marL="0">
+                        <a:buNone/>
+                      </a:pPr>
+                      <a:r>
+                        <a:rPr lang="en-US" sz="900" dirty="0">
+                          <a:solidFill>
+                            <a:srgbClr val="333333"/>
+                          </a:solidFill>
+                          <a:latin typeface="Calibri" pitchFamily="34" charset="0"/>
+                          <a:ea typeface="Calibri" pitchFamily="34" charset="-122"/>
+                          <a:cs typeface="Calibri" pitchFamily="34" charset="-120"/>
+                        </a:rPr>
+                        <a:t>(+35% YoY)</a:t>
+                      </a:r>
+                      <a:endParaRPr lang="en-US" sz="900" dirty="0">
                         <a:latin typeface="Calibri" charset="0"/>
                         <a:ea typeface="Calibri" charset="0"/>
                         <a:cs typeface="Calibri" charset="0"/>
                       </a:endParaRPr>
                     </a:p>
                   </a:txBody>
-                  <a:tcPr marL="50800" marR="50800" marT="25400" marB="25400" anchor="ctr">
-                    <a:lnL w="0" cap="flat" cmpd="sng" algn="ctr">
-                      <a:solidFill>
-                        <a:srgbClr val="FFFFFF"/>
+                  <a:tcPr marL="91440" marR="91440" marT="45720" marB="45720" anchor="ctr">
+                    <a:lnL w="9525" cap="flat" cmpd="sng" algn="ctr">
+                      <a:solidFill>
+                        <a:srgbClr val="C0C0C0"/>
                       </a:solidFill>
                       <a:prstDash val="solid"/>
                       <a:round/>
                       <a:headEnd type="none" w="med" len="med"/>
                       <a:tailEnd type="none" w="med" len="med"/>
                     </a:lnL>
-                    <a:lnR w="0" cap="flat" cmpd="sng" algn="ctr">
-                      <a:solidFill>
-                        <a:srgbClr val="FFFFFF"/>
+                    <a:lnR w="9525" cap="flat" cmpd="sng" algn="ctr">
+                      <a:solidFill>
+                        <a:srgbClr val="C0C0C0"/>
                       </a:solidFill>
                       <a:prstDash val="solid"/>
                       <a:round/>
                       <a:headEnd type="none" w="med" len="med"/>
                       <a:tailEnd type="none" w="med" len="med"/>
                     </a:lnR>
-                    <a:lnT w="0" cap="flat" cmpd="sng" algn="ctr">
-                      <a:solidFill>
-                        <a:srgbClr val="FFFFFF"/>
+                    <a:lnT w="9525" cap="flat" cmpd="sng" algn="ctr">
+                      <a:solidFill>
+                        <a:srgbClr val="C0C0C0"/>
                       </a:solidFill>
                       <a:prstDash val="solid"/>
                       <a:round/>
                       <a:headEnd type="none" w="med" len="med"/>
                       <a:tailEnd type="none" w="med" len="med"/>
                     </a:lnT>
-                    <a:lnB w="6350" cap="flat" cmpd="sng" algn="ctr">
-                      <a:solidFill>
-                        <a:srgbClr val="E8E8E8"/>
+                    <a:lnB w="9525" cap="flat" cmpd="sng" algn="ctr">
+                      <a:solidFill>
+                        <a:srgbClr val="C0C0C0"/>
                       </a:solidFill>
                       <a:prstDash val="solid"/>
                       <a:round/>
                       <a:headEnd type="none" w="med" len="med"/>
                       <a:tailEnd type="none" w="med" len="med"/>
                     </a:lnB>
+                    <a:solidFill>
+                      <a:srgbClr val="FFFFFF"/>
+                    </a:solidFill>
+                  </a:tcPr>
+                </a:tc>
+              </a:tr>
+              <a:tr h="365760">
+                <a:tc>
+                  <a:txBody>
+                    <a:bodyPr/>
+                    <a:lstStyle/>
+                    <a:p>
+                      <a:pPr indent="0" marL="0">
+                        <a:buNone/>
+                      </a:pPr>
+                      <a:r>
+                        <a:rPr lang="en-US" sz="900" b="1" dirty="0">
+                          <a:solidFill>
+                            <a:srgbClr val="000000"/>
+                          </a:solidFill>
+                          <a:latin typeface="Calibri" pitchFamily="34" charset="0"/>
+                          <a:ea typeface="Calibri" pitchFamily="34" charset="-122"/>
+                          <a:cs typeface="Calibri" pitchFamily="34" charset="-120"/>
+                        </a:rPr>
+                        <a:t>Market share</a:t>
+                      </a:r>
+                      <a:endParaRPr lang="en-US" sz="900" dirty="0">
+                        <a:latin typeface="Calibri" charset="0"/>
+                        <a:ea typeface="Calibri" charset="0"/>
+                        <a:cs typeface="Calibri" charset="0"/>
+                      </a:endParaRPr>
+                    </a:p>
+                    <a:p>
+                      <a:pPr indent="0" marL="0">
+                        <a:buNone/>
+                      </a:pPr>
+                      <a:r>
+                        <a:rPr lang="en-US" sz="900" b="1" dirty="0">
+                          <a:solidFill>
+                            <a:srgbClr val="000000"/>
+                          </a:solidFill>
+                          <a:latin typeface="Calibri" pitchFamily="34" charset="0"/>
+                          <a:ea typeface="Calibri" pitchFamily="34" charset="-122"/>
+                          <a:cs typeface="Calibri" pitchFamily="34" charset="-120"/>
+                        </a:rPr>
+                        <a:t>of new sales</a:t>
+                      </a:r>
+                      <a:endParaRPr lang="en-US" sz="900" dirty="0">
+                        <a:latin typeface="Calibri" charset="0"/>
+                        <a:ea typeface="Calibri" charset="0"/>
+                        <a:cs typeface="Calibri" charset="0"/>
+                      </a:endParaRPr>
+                    </a:p>
+                  </a:txBody>
+                  <a:tcPr marL="91440" marR="91440" marT="45720" marB="45720" anchor="ctr">
+                    <a:lnL w="9525" cap="flat" cmpd="sng" algn="ctr">
+                      <a:solidFill>
+                        <a:srgbClr val="C0C0C0"/>
+                      </a:solidFill>
+                      <a:prstDash val="solid"/>
+                      <a:round/>
+                      <a:headEnd type="none" w="med" len="med"/>
+                      <a:tailEnd type="none" w="med" len="med"/>
+                    </a:lnL>
+                    <a:lnR w="9525" cap="flat" cmpd="sng" algn="ctr">
+                      <a:solidFill>
+                        <a:srgbClr val="C0C0C0"/>
+                      </a:solidFill>
+                      <a:prstDash val="solid"/>
+                      <a:round/>
+                      <a:headEnd type="none" w="med" len="med"/>
+                      <a:tailEnd type="none" w="med" len="med"/>
+                    </a:lnR>
+                    <a:lnT w="9525" cap="flat" cmpd="sng" algn="ctr">
+                      <a:solidFill>
+                        <a:srgbClr val="C0C0C0"/>
+                      </a:solidFill>
+                      <a:prstDash val="solid"/>
+                      <a:round/>
+                      <a:headEnd type="none" w="med" len="med"/>
+                      <a:tailEnd type="none" w="med" len="med"/>
+                    </a:lnT>
+                    <a:lnB w="9525" cap="flat" cmpd="sng" algn="ctr">
+                      <a:solidFill>
+                        <a:srgbClr val="C0C0C0"/>
+                      </a:solidFill>
+                      <a:prstDash val="solid"/>
+                      <a:round/>
+                      <a:headEnd type="none" w="med" len="med"/>
+                      <a:tailEnd type="none" w="med" len="med"/>
+                    </a:lnB>
+                    <a:solidFill>
+                      <a:srgbClr val="FFFFFF"/>
+                    </a:solidFill>
                   </a:tcPr>
                 </a:tc>
                 <a:tc>
@@ -2402,64 +1762,88 @@
                     <a:bodyPr/>
                     <a:lstStyle/>
                     <a:p>
-                      <a:pPr algn="ctr" indent="0" marL="0">
-                        <a:buNone/>
-                      </a:pPr>
-                      <a:r>
-                        <a:rPr lang="en-US" sz="800" dirty="0">
-                          <a:solidFill>
-                            <a:srgbClr val="404040"/>
-                          </a:solidFill>
-                          <a:latin typeface="Calibri" pitchFamily="34" charset="0"/>
-                          <a:ea typeface="Calibri" pitchFamily="34" charset="-122"/>
-                          <a:cs typeface="Calibri" pitchFamily="34" charset="-120"/>
-                        </a:rPr>
-                        <a:t>1.0</a:t>
-                      </a:r>
-                      <a:endParaRPr lang="en-US" sz="800" dirty="0">
+                      <a:pPr indent="0" marL="0">
+                        <a:buNone/>
+                      </a:pPr>
+                      <a:r>
+                        <a:rPr lang="en-US" sz="900" dirty="0">
+                          <a:solidFill>
+                            <a:srgbClr val="333333"/>
+                          </a:solidFill>
+                          <a:latin typeface="Calibri" pitchFamily="34" charset="0"/>
+                          <a:ea typeface="Calibri" pitchFamily="34" charset="-122"/>
+                          <a:cs typeface="Calibri" pitchFamily="34" charset="-120"/>
+                        </a:rPr>
+                        <a:t>~45% of all new</a:t>
+                      </a:r>
+                      <a:endParaRPr lang="en-US" sz="900" dirty="0">
+                        <a:latin typeface="Calibri" charset="0"/>
+                        <a:ea typeface="Calibri" charset="0"/>
+                        <a:cs typeface="Calibri" charset="0"/>
+                      </a:endParaRPr>
+                    </a:p>
+                    <a:p>
+                      <a:pPr indent="0" marL="0">
+                        <a:buNone/>
+                      </a:pPr>
+                      <a:r>
+                        <a:rPr lang="en-US" sz="900" dirty="0">
+                          <a:solidFill>
+                            <a:srgbClr val="333333"/>
+                          </a:solidFill>
+                          <a:latin typeface="Calibri" pitchFamily="34" charset="0"/>
+                          <a:ea typeface="Calibri" pitchFamily="34" charset="-122"/>
+                          <a:cs typeface="Calibri" pitchFamily="34" charset="-120"/>
+                        </a:rPr>
+                        <a:t>car sales</a:t>
+                      </a:r>
+                      <a:endParaRPr lang="en-US" sz="900" dirty="0">
                         <a:latin typeface="Calibri" charset="0"/>
                         <a:ea typeface="Calibri" charset="0"/>
                         <a:cs typeface="Calibri" charset="0"/>
                       </a:endParaRPr>
                     </a:p>
                   </a:txBody>
-                  <a:tcPr marL="50800" marR="50800" marT="25400" marB="25400" anchor="ctr">
-                    <a:lnL w="0" cap="flat" cmpd="sng" algn="ctr">
-                      <a:solidFill>
-                        <a:srgbClr val="FFFFFF"/>
+                  <a:tcPr marL="91440" marR="91440" marT="45720" marB="45720" anchor="ctr">
+                    <a:lnL w="9525" cap="flat" cmpd="sng" algn="ctr">
+                      <a:solidFill>
+                        <a:srgbClr val="C0C0C0"/>
                       </a:solidFill>
                       <a:prstDash val="solid"/>
                       <a:round/>
                       <a:headEnd type="none" w="med" len="med"/>
                       <a:tailEnd type="none" w="med" len="med"/>
                     </a:lnL>
-                    <a:lnR w="0" cap="flat" cmpd="sng" algn="ctr">
-                      <a:solidFill>
-                        <a:srgbClr val="FFFFFF"/>
+                    <a:lnR w="9525" cap="flat" cmpd="sng" algn="ctr">
+                      <a:solidFill>
+                        <a:srgbClr val="C0C0C0"/>
                       </a:solidFill>
                       <a:prstDash val="solid"/>
                       <a:round/>
                       <a:headEnd type="none" w="med" len="med"/>
                       <a:tailEnd type="none" w="med" len="med"/>
                     </a:lnR>
-                    <a:lnT w="0" cap="flat" cmpd="sng" algn="ctr">
-                      <a:solidFill>
-                        <a:srgbClr val="FFFFFF"/>
+                    <a:lnT w="9525" cap="flat" cmpd="sng" algn="ctr">
+                      <a:solidFill>
+                        <a:srgbClr val="C0C0C0"/>
                       </a:solidFill>
                       <a:prstDash val="solid"/>
                       <a:round/>
                       <a:headEnd type="none" w="med" len="med"/>
                       <a:tailEnd type="none" w="med" len="med"/>
                     </a:lnT>
-                    <a:lnB w="6350" cap="flat" cmpd="sng" algn="ctr">
-                      <a:solidFill>
-                        <a:srgbClr val="E8E8E8"/>
+                    <a:lnB w="9525" cap="flat" cmpd="sng" algn="ctr">
+                      <a:solidFill>
+                        <a:srgbClr val="C0C0C0"/>
                       </a:solidFill>
                       <a:prstDash val="solid"/>
                       <a:round/>
                       <a:headEnd type="none" w="med" len="med"/>
                       <a:tailEnd type="none" w="med" len="med"/>
                     </a:lnB>
+                    <a:solidFill>
+                      <a:srgbClr val="FFFFFF"/>
+                    </a:solidFill>
                   </a:tcPr>
                 </a:tc>
                 <a:tc>
@@ -2467,64 +1851,88 @@
                     <a:bodyPr/>
                     <a:lstStyle/>
                     <a:p>
-                      <a:pPr algn="ctr" indent="0" marL="0">
-                        <a:buNone/>
-                      </a:pPr>
-                      <a:r>
-                        <a:rPr lang="en-US" sz="800" dirty="0">
-                          <a:solidFill>
-                            <a:srgbClr val="404040"/>
-                          </a:solidFill>
-                          <a:latin typeface="Calibri" pitchFamily="34" charset="0"/>
-                          <a:ea typeface="Calibri" pitchFamily="34" charset="-122"/>
-                          <a:cs typeface="Calibri" pitchFamily="34" charset="-120"/>
-                        </a:rPr>
-                        <a:t>2.0</a:t>
-                      </a:r>
-                      <a:endParaRPr lang="en-US" sz="800" dirty="0">
+                      <a:pPr indent="0" marL="0">
+                        <a:buNone/>
+                      </a:pPr>
+                      <a:r>
+                        <a:rPr lang="en-US" sz="900" dirty="0">
+                          <a:solidFill>
+                            <a:srgbClr val="333333"/>
+                          </a:solidFill>
+                          <a:latin typeface="Calibri" pitchFamily="34" charset="0"/>
+                          <a:ea typeface="Calibri" pitchFamily="34" charset="-122"/>
+                          <a:cs typeface="Calibri" pitchFamily="34" charset="-120"/>
+                        </a:rPr>
+                        <a:t>~24% of all new</a:t>
+                      </a:r>
+                      <a:endParaRPr lang="en-US" sz="900" dirty="0">
+                        <a:latin typeface="Calibri" charset="0"/>
+                        <a:ea typeface="Calibri" charset="0"/>
+                        <a:cs typeface="Calibri" charset="0"/>
+                      </a:endParaRPr>
+                    </a:p>
+                    <a:p>
+                      <a:pPr indent="0" marL="0">
+                        <a:buNone/>
+                      </a:pPr>
+                      <a:r>
+                        <a:rPr lang="en-US" sz="900" dirty="0">
+                          <a:solidFill>
+                            <a:srgbClr val="333333"/>
+                          </a:solidFill>
+                          <a:latin typeface="Calibri" pitchFamily="34" charset="0"/>
+                          <a:ea typeface="Calibri" pitchFamily="34" charset="-122"/>
+                          <a:cs typeface="Calibri" pitchFamily="34" charset="-120"/>
+                        </a:rPr>
+                        <a:t>car sales</a:t>
+                      </a:r>
+                      <a:endParaRPr lang="en-US" sz="900" dirty="0">
                         <a:latin typeface="Calibri" charset="0"/>
                         <a:ea typeface="Calibri" charset="0"/>
                         <a:cs typeface="Calibri" charset="0"/>
                       </a:endParaRPr>
                     </a:p>
                   </a:txBody>
-                  <a:tcPr marL="50800" marR="50800" marT="25400" marB="25400" anchor="ctr">
-                    <a:lnL w="0" cap="flat" cmpd="sng" algn="ctr">
-                      <a:solidFill>
-                        <a:srgbClr val="FFFFFF"/>
+                  <a:tcPr marL="91440" marR="91440" marT="45720" marB="45720" anchor="ctr">
+                    <a:lnL w="9525" cap="flat" cmpd="sng" algn="ctr">
+                      <a:solidFill>
+                        <a:srgbClr val="C0C0C0"/>
                       </a:solidFill>
                       <a:prstDash val="solid"/>
                       <a:round/>
                       <a:headEnd type="none" w="med" len="med"/>
                       <a:tailEnd type="none" w="med" len="med"/>
                     </a:lnL>
-                    <a:lnR w="0" cap="flat" cmpd="sng" algn="ctr">
-                      <a:solidFill>
-                        <a:srgbClr val="FFFFFF"/>
+                    <a:lnR w="9525" cap="flat" cmpd="sng" algn="ctr">
+                      <a:solidFill>
+                        <a:srgbClr val="C0C0C0"/>
                       </a:solidFill>
                       <a:prstDash val="solid"/>
                       <a:round/>
                       <a:headEnd type="none" w="med" len="med"/>
                       <a:tailEnd type="none" w="med" len="med"/>
                     </a:lnR>
-                    <a:lnT w="0" cap="flat" cmpd="sng" algn="ctr">
-                      <a:solidFill>
-                        <a:srgbClr val="FFFFFF"/>
+                    <a:lnT w="9525" cap="flat" cmpd="sng" algn="ctr">
+                      <a:solidFill>
+                        <a:srgbClr val="C0C0C0"/>
                       </a:solidFill>
                       <a:prstDash val="solid"/>
                       <a:round/>
                       <a:headEnd type="none" w="med" len="med"/>
                       <a:tailEnd type="none" w="med" len="med"/>
                     </a:lnT>
-                    <a:lnB w="6350" cap="flat" cmpd="sng" algn="ctr">
-                      <a:solidFill>
-                        <a:srgbClr val="E8E8E8"/>
+                    <a:lnB w="9525" cap="flat" cmpd="sng" algn="ctr">
+                      <a:solidFill>
+                        <a:srgbClr val="C0C0C0"/>
                       </a:solidFill>
                       <a:prstDash val="solid"/>
                       <a:round/>
                       <a:headEnd type="none" w="med" len="med"/>
                       <a:tailEnd type="none" w="med" len="med"/>
                     </a:lnB>
+                    <a:solidFill>
+                      <a:srgbClr val="FFFFFF"/>
+                    </a:solidFill>
                   </a:tcPr>
                 </a:tc>
                 <a:tc>
@@ -2532,64 +1940,158 @@
                     <a:bodyPr/>
                     <a:lstStyle/>
                     <a:p>
-                      <a:pPr algn="ctr" indent="0" marL="0">
-                        <a:buNone/>
-                      </a:pPr>
-                      <a:r>
-                        <a:rPr lang="en-US" sz="800" dirty="0">
-                          <a:solidFill>
-                            <a:srgbClr val="404040"/>
-                          </a:solidFill>
-                          <a:latin typeface="Calibri" pitchFamily="34" charset="0"/>
-                          <a:ea typeface="Calibri" pitchFamily="34" charset="-122"/>
-                          <a:cs typeface="Calibri" pitchFamily="34" charset="-120"/>
-                        </a:rPr>
-                        <a:t>3-4</a:t>
-                      </a:r>
-                      <a:endParaRPr lang="en-US" sz="800" dirty="0">
+                      <a:pPr indent="0" marL="0">
+                        <a:buNone/>
+                      </a:pPr>
+                      <a:r>
+                        <a:rPr lang="en-US" sz="900" dirty="0">
+                          <a:solidFill>
+                            <a:srgbClr val="333333"/>
+                          </a:solidFill>
+                          <a:latin typeface="Calibri" pitchFamily="34" charset="0"/>
+                          <a:ea typeface="Calibri" pitchFamily="34" charset="-122"/>
+                          <a:cs typeface="Calibri" pitchFamily="34" charset="-120"/>
+                        </a:rPr>
+                        <a:t>~10% of all new</a:t>
+                      </a:r>
+                      <a:endParaRPr lang="en-US" sz="900" dirty="0">
+                        <a:latin typeface="Calibri" charset="0"/>
+                        <a:ea typeface="Calibri" charset="0"/>
+                        <a:cs typeface="Calibri" charset="0"/>
+                      </a:endParaRPr>
+                    </a:p>
+                    <a:p>
+                      <a:pPr indent="0" marL="0">
+                        <a:buNone/>
+                      </a:pPr>
+                      <a:r>
+                        <a:rPr lang="en-US" sz="900" dirty="0">
+                          <a:solidFill>
+                            <a:srgbClr val="333333"/>
+                          </a:solidFill>
+                          <a:latin typeface="Calibri" pitchFamily="34" charset="0"/>
+                          <a:ea typeface="Calibri" pitchFamily="34" charset="-122"/>
+                          <a:cs typeface="Calibri" pitchFamily="34" charset="-120"/>
+                        </a:rPr>
+                        <a:t>car sales</a:t>
+                      </a:r>
+                      <a:endParaRPr lang="en-US" sz="900" dirty="0">
                         <a:latin typeface="Calibri" charset="0"/>
                         <a:ea typeface="Calibri" charset="0"/>
                         <a:cs typeface="Calibri" charset="0"/>
                       </a:endParaRPr>
                     </a:p>
                   </a:txBody>
-                  <a:tcPr marL="50800" marR="50800" marT="25400" marB="25400" anchor="ctr">
-                    <a:lnL w="0" cap="flat" cmpd="sng" algn="ctr">
-                      <a:solidFill>
-                        <a:srgbClr val="FFFFFF"/>
+                  <a:tcPr marL="91440" marR="91440" marT="45720" marB="45720" anchor="ctr">
+                    <a:lnL w="9525" cap="flat" cmpd="sng" algn="ctr">
+                      <a:solidFill>
+                        <a:srgbClr val="C0C0C0"/>
                       </a:solidFill>
                       <a:prstDash val="solid"/>
                       <a:round/>
                       <a:headEnd type="none" w="med" len="med"/>
                       <a:tailEnd type="none" w="med" len="med"/>
                     </a:lnL>
-                    <a:lnR w="0" cap="flat" cmpd="sng" algn="ctr">
-                      <a:solidFill>
-                        <a:srgbClr val="FFFFFF"/>
+                    <a:lnR w="9525" cap="flat" cmpd="sng" algn="ctr">
+                      <a:solidFill>
+                        <a:srgbClr val="C0C0C0"/>
                       </a:solidFill>
                       <a:prstDash val="solid"/>
                       <a:round/>
                       <a:headEnd type="none" w="med" len="med"/>
                       <a:tailEnd type="none" w="med" len="med"/>
                     </a:lnR>
-                    <a:lnT w="0" cap="flat" cmpd="sng" algn="ctr">
-                      <a:solidFill>
-                        <a:srgbClr val="FFFFFF"/>
+                    <a:lnT w="9525" cap="flat" cmpd="sng" algn="ctr">
+                      <a:solidFill>
+                        <a:srgbClr val="C0C0C0"/>
                       </a:solidFill>
                       <a:prstDash val="solid"/>
                       <a:round/>
                       <a:headEnd type="none" w="med" len="med"/>
                       <a:tailEnd type="none" w="med" len="med"/>
                     </a:lnT>
-                    <a:lnB w="6350" cap="flat" cmpd="sng" algn="ctr">
-                      <a:solidFill>
-                        <a:srgbClr val="E8E8E8"/>
+                    <a:lnB w="9525" cap="flat" cmpd="sng" algn="ctr">
+                      <a:solidFill>
+                        <a:srgbClr val="C0C0C0"/>
                       </a:solidFill>
                       <a:prstDash val="solid"/>
                       <a:round/>
                       <a:headEnd type="none" w="med" len="med"/>
                       <a:tailEnd type="none" w="med" len="med"/>
                     </a:lnB>
+                    <a:solidFill>
+                      <a:srgbClr val="FFFFFF"/>
+                    </a:solidFill>
+                  </a:tcPr>
+                </a:tc>
+              </a:tr>
+              <a:tr h="365760">
+                <a:tc>
+                  <a:txBody>
+                    <a:bodyPr/>
+                    <a:lstStyle/>
+                    <a:p>
+                      <a:pPr indent="0" marL="0">
+                        <a:buNone/>
+                      </a:pPr>
+                      <a:r>
+                        <a:rPr lang="en-US" sz="900" b="1" dirty="0">
+                          <a:solidFill>
+                            <a:srgbClr val="000000"/>
+                          </a:solidFill>
+                          <a:latin typeface="Calibri" pitchFamily="34" charset="0"/>
+                          <a:ea typeface="Calibri" pitchFamily="34" charset="-122"/>
+                          <a:cs typeface="Calibri" pitchFamily="34" charset="-120"/>
+                        </a:rPr>
+                        <a:t>Key players</a:t>
+                      </a:r>
+                      <a:endParaRPr lang="en-US" sz="900" dirty="0">
+                        <a:latin typeface="Calibri" charset="0"/>
+                        <a:ea typeface="Calibri" charset="0"/>
+                        <a:cs typeface="Calibri" charset="0"/>
+                      </a:endParaRPr>
+                    </a:p>
+                  </a:txBody>
+                  <a:tcPr marL="91440" marR="91440" marT="45720" marB="45720" anchor="ctr">
+                    <a:lnL w="9525" cap="flat" cmpd="sng" algn="ctr">
+                      <a:solidFill>
+                        <a:srgbClr val="C0C0C0"/>
+                      </a:solidFill>
+                      <a:prstDash val="solid"/>
+                      <a:round/>
+                      <a:headEnd type="none" w="med" len="med"/>
+                      <a:tailEnd type="none" w="med" len="med"/>
+                    </a:lnL>
+                    <a:lnR w="9525" cap="flat" cmpd="sng" algn="ctr">
+                      <a:solidFill>
+                        <a:srgbClr val="C0C0C0"/>
+                      </a:solidFill>
+                      <a:prstDash val="solid"/>
+                      <a:round/>
+                      <a:headEnd type="none" w="med" len="med"/>
+                      <a:tailEnd type="none" w="med" len="med"/>
+                    </a:lnR>
+                    <a:lnT w="9525" cap="flat" cmpd="sng" algn="ctr">
+                      <a:solidFill>
+                        <a:srgbClr val="C0C0C0"/>
+                      </a:solidFill>
+                      <a:prstDash val="solid"/>
+                      <a:round/>
+                      <a:headEnd type="none" w="med" len="med"/>
+                      <a:tailEnd type="none" w="med" len="med"/>
+                    </a:lnT>
+                    <a:lnB w="9525" cap="flat" cmpd="sng" algn="ctr">
+                      <a:solidFill>
+                        <a:srgbClr val="C0C0C0"/>
+                      </a:solidFill>
+                      <a:prstDash val="solid"/>
+                      <a:round/>
+                      <a:headEnd type="none" w="med" len="med"/>
+                      <a:tailEnd type="none" w="med" len="med"/>
+                    </a:lnB>
+                    <a:solidFill>
+                      <a:srgbClr val="FFFFFF"/>
+                    </a:solidFill>
                   </a:tcPr>
                 </a:tc>
                 <a:tc>
@@ -2597,131 +2099,88 @@
                     <a:bodyPr/>
                     <a:lstStyle/>
                     <a:p>
-                      <a:pPr algn="ctr" indent="0" marL="0">
-                        <a:buNone/>
-                      </a:pPr>
-                      <a:r>
-                        <a:rPr lang="en-US" sz="800" dirty="0">
-                          <a:solidFill>
-                            <a:srgbClr val="404040"/>
-                          </a:solidFill>
-                          <a:latin typeface="Calibri" pitchFamily="34" charset="0"/>
-                          <a:ea typeface="Calibri" pitchFamily="34" charset="-122"/>
-                          <a:cs typeface="Calibri" pitchFamily="34" charset="-120"/>
-                        </a:rPr>
-                        <a:t>8+</a:t>
-                      </a:r>
-                      <a:endParaRPr lang="en-US" sz="800" dirty="0">
+                      <a:pPr indent="0" marL="0">
+                        <a:buNone/>
+                      </a:pPr>
+                      <a:r>
+                        <a:rPr lang="en-US" sz="900" dirty="0">
+                          <a:solidFill>
+                            <a:srgbClr val="333333"/>
+                          </a:solidFill>
+                          <a:latin typeface="Calibri" pitchFamily="34" charset="0"/>
+                          <a:ea typeface="Calibri" pitchFamily="34" charset="-122"/>
+                          <a:cs typeface="Calibri" pitchFamily="34" charset="-120"/>
+                        </a:rPr>
+                        <a:t>BYD, NIO, XPeng,</a:t>
+                      </a:r>
+                      <a:endParaRPr lang="en-US" sz="900" dirty="0">
+                        <a:latin typeface="Calibri" charset="0"/>
+                        <a:ea typeface="Calibri" charset="0"/>
+                        <a:cs typeface="Calibri" charset="0"/>
+                      </a:endParaRPr>
+                    </a:p>
+                    <a:p>
+                      <a:pPr indent="0" marL="0">
+                        <a:buNone/>
+                      </a:pPr>
+                      <a:r>
+                        <a:rPr lang="en-US" sz="900" dirty="0">
+                          <a:solidFill>
+                            <a:srgbClr val="333333"/>
+                          </a:solidFill>
+                          <a:latin typeface="Calibri" pitchFamily="34" charset="0"/>
+                          <a:ea typeface="Calibri" pitchFamily="34" charset="-122"/>
+                          <a:cs typeface="Calibri" pitchFamily="34" charset="-120"/>
+                        </a:rPr>
+                        <a:t>Li Auto, Tesla</a:t>
+                      </a:r>
+                      <a:endParaRPr lang="en-US" sz="900" dirty="0">
                         <a:latin typeface="Calibri" charset="0"/>
                         <a:ea typeface="Calibri" charset="0"/>
                         <a:cs typeface="Calibri" charset="0"/>
                       </a:endParaRPr>
                     </a:p>
                   </a:txBody>
-                  <a:tcPr marL="50800" marR="50800" marT="25400" marB="25400" anchor="ctr">
-                    <a:lnL w="0" cap="flat" cmpd="sng" algn="ctr">
-                      <a:solidFill>
-                        <a:srgbClr val="FFFFFF"/>
+                  <a:tcPr marL="91440" marR="91440" marT="45720" marB="45720" anchor="ctr">
+                    <a:lnL w="9525" cap="flat" cmpd="sng" algn="ctr">
+                      <a:solidFill>
+                        <a:srgbClr val="C0C0C0"/>
                       </a:solidFill>
                       <a:prstDash val="solid"/>
                       <a:round/>
                       <a:headEnd type="none" w="med" len="med"/>
                       <a:tailEnd type="none" w="med" len="med"/>
                     </a:lnL>
-                    <a:lnR w="0" cap="flat" cmpd="sng" algn="ctr">
-                      <a:solidFill>
-                        <a:srgbClr val="FFFFFF"/>
+                    <a:lnR w="9525" cap="flat" cmpd="sng" algn="ctr">
+                      <a:solidFill>
+                        <a:srgbClr val="C0C0C0"/>
                       </a:solidFill>
                       <a:prstDash val="solid"/>
                       <a:round/>
                       <a:headEnd type="none" w="med" len="med"/>
                       <a:tailEnd type="none" w="med" len="med"/>
                     </a:lnR>
-                    <a:lnT w="0" cap="flat" cmpd="sng" algn="ctr">
-                      <a:solidFill>
-                        <a:srgbClr val="FFFFFF"/>
+                    <a:lnT w="9525" cap="flat" cmpd="sng" algn="ctr">
+                      <a:solidFill>
+                        <a:srgbClr val="C0C0C0"/>
                       </a:solidFill>
                       <a:prstDash val="solid"/>
                       <a:round/>
                       <a:headEnd type="none" w="med" len="med"/>
                       <a:tailEnd type="none" w="med" len="med"/>
                     </a:lnT>
-                    <a:lnB w="6350" cap="flat" cmpd="sng" algn="ctr">
-                      <a:solidFill>
-                        <a:srgbClr val="E8E8E8"/>
+                    <a:lnB w="9525" cap="flat" cmpd="sng" algn="ctr">
+                      <a:solidFill>
+                        <a:srgbClr val="C0C0C0"/>
                       </a:solidFill>
                       <a:prstDash val="solid"/>
                       <a:round/>
                       <a:headEnd type="none" w="med" len="med"/>
                       <a:tailEnd type="none" w="med" len="med"/>
                     </a:lnB>
-                  </a:tcPr>
-                </a:tc>
-              </a:tr>
-              <a:tr h="256032">
-                <a:tc>
-                  <a:txBody>
-                    <a:bodyPr/>
-                    <a:lstStyle/>
-                    <a:p>
-                      <a:pPr algn="l" indent="0" marL="0">
-                        <a:buNone/>
-                      </a:pPr>
-                      <a:r>
-                        <a:rPr lang="en-US" sz="850" b="1" dirty="0">
-                          <a:solidFill>
-                            <a:srgbClr val="333333"/>
-                          </a:solidFill>
-                          <a:latin typeface="Calibri" pitchFamily="34" charset="0"/>
-                          <a:ea typeface="Calibri" pitchFamily="34" charset="-122"/>
-                          <a:cs typeface="Calibri" pitchFamily="34" charset="-120"/>
-                        </a:rPr>
-                        <a:t>Green H2 cost (EUR/kg)</a:t>
-                      </a:r>
-                      <a:endParaRPr lang="en-US" sz="850" dirty="0">
-                        <a:latin typeface="Calibri" charset="0"/>
-                        <a:ea typeface="Calibri" charset="0"/>
-                        <a:cs typeface="Calibri" charset="0"/>
-                      </a:endParaRPr>
-                    </a:p>
-                  </a:txBody>
-                  <a:tcPr marL="50800" marR="50800" marT="25400" marB="25400" anchor="ctr">
-                    <a:lnL w="0" cap="flat" cmpd="sng" algn="ctr">
-                      <a:solidFill>
-                        <a:srgbClr val="FFFFFF"/>
-                      </a:solidFill>
-                      <a:prstDash val="solid"/>
-                      <a:round/>
-                      <a:headEnd type="none" w="med" len="med"/>
-                      <a:tailEnd type="none" w="med" len="med"/>
-                    </a:lnL>
-                    <a:lnR w="0" cap="flat" cmpd="sng" algn="ctr">
-                      <a:solidFill>
-                        <a:srgbClr val="FFFFFF"/>
-                      </a:solidFill>
-                      <a:prstDash val="solid"/>
-                      <a:round/>
-                      <a:headEnd type="none" w="med" len="med"/>
-                      <a:tailEnd type="none" w="med" len="med"/>
-                    </a:lnR>
-                    <a:lnT w="0" cap="flat" cmpd="sng" algn="ctr">
-                      <a:solidFill>
-                        <a:srgbClr val="FFFFFF"/>
-                      </a:solidFill>
-                      <a:prstDash val="solid"/>
-                      <a:round/>
-                      <a:headEnd type="none" w="med" len="med"/>
-                      <a:tailEnd type="none" w="med" len="med"/>
-                    </a:lnT>
-                    <a:lnB w="6350" cap="flat" cmpd="sng" algn="ctr">
-                      <a:solidFill>
-                        <a:srgbClr val="E8E8E8"/>
-                      </a:solidFill>
-                      <a:prstDash val="solid"/>
-                      <a:round/>
-                      <a:headEnd type="none" w="med" len="med"/>
-                      <a:tailEnd type="none" w="med" len="med"/>
-                    </a:lnB>
+                    <a:solidFill>
+                      <a:srgbClr val="FFFFFF"/>
+                    </a:solidFill>
                   </a:tcPr>
                 </a:tc>
                 <a:tc>
@@ -2729,64 +2188,88 @@
                     <a:bodyPr/>
                     <a:lstStyle/>
                     <a:p>
-                      <a:pPr algn="ctr" indent="0" marL="0">
-                        <a:buNone/>
-                      </a:pPr>
-                      <a:r>
-                        <a:rPr lang="en-US" sz="800" dirty="0">
-                          <a:solidFill>
-                            <a:srgbClr val="404040"/>
-                          </a:solidFill>
-                          <a:latin typeface="Calibri" pitchFamily="34" charset="0"/>
-                          <a:ea typeface="Calibri" pitchFamily="34" charset="-122"/>
-                          <a:cs typeface="Calibri" pitchFamily="34" charset="-120"/>
-                        </a:rPr>
-                        <a:t>5-6</a:t>
-                      </a:r>
-                      <a:endParaRPr lang="en-US" sz="800" dirty="0">
+                      <a:pPr indent="0" marL="0">
+                        <a:buNone/>
+                      </a:pPr>
+                      <a:r>
+                        <a:rPr lang="en-US" sz="900" dirty="0">
+                          <a:solidFill>
+                            <a:srgbClr val="333333"/>
+                          </a:solidFill>
+                          <a:latin typeface="Calibri" pitchFamily="34" charset="0"/>
+                          <a:ea typeface="Calibri" pitchFamily="34" charset="-122"/>
+                          <a:cs typeface="Calibri" pitchFamily="34" charset="-120"/>
+                        </a:rPr>
+                        <a:t>VW Group, Stellantis,</a:t>
+                      </a:r>
+                      <a:endParaRPr lang="en-US" sz="900" dirty="0">
+                        <a:latin typeface="Calibri" charset="0"/>
+                        <a:ea typeface="Calibri" charset="0"/>
+                        <a:cs typeface="Calibri" charset="0"/>
+                      </a:endParaRPr>
+                    </a:p>
+                    <a:p>
+                      <a:pPr indent="0" marL="0">
+                        <a:buNone/>
+                      </a:pPr>
+                      <a:r>
+                        <a:rPr lang="en-US" sz="900" dirty="0">
+                          <a:solidFill>
+                            <a:srgbClr val="333333"/>
+                          </a:solidFill>
+                          <a:latin typeface="Calibri" pitchFamily="34" charset="0"/>
+                          <a:ea typeface="Calibri" pitchFamily="34" charset="-122"/>
+                          <a:cs typeface="Calibri" pitchFamily="34" charset="-120"/>
+                        </a:rPr>
+                        <a:t>BMW, Mercedes, Tesla</a:t>
+                      </a:r>
+                      <a:endParaRPr lang="en-US" sz="900" dirty="0">
                         <a:latin typeface="Calibri" charset="0"/>
                         <a:ea typeface="Calibri" charset="0"/>
                         <a:cs typeface="Calibri" charset="0"/>
                       </a:endParaRPr>
                     </a:p>
                   </a:txBody>
-                  <a:tcPr marL="50800" marR="50800" marT="25400" marB="25400" anchor="ctr">
-                    <a:lnL w="0" cap="flat" cmpd="sng" algn="ctr">
-                      <a:solidFill>
-                        <a:srgbClr val="FFFFFF"/>
+                  <a:tcPr marL="91440" marR="91440" marT="45720" marB="45720" anchor="ctr">
+                    <a:lnL w="9525" cap="flat" cmpd="sng" algn="ctr">
+                      <a:solidFill>
+                        <a:srgbClr val="C0C0C0"/>
                       </a:solidFill>
                       <a:prstDash val="solid"/>
                       <a:round/>
                       <a:headEnd type="none" w="med" len="med"/>
                       <a:tailEnd type="none" w="med" len="med"/>
                     </a:lnL>
-                    <a:lnR w="0" cap="flat" cmpd="sng" algn="ctr">
-                      <a:solidFill>
-                        <a:srgbClr val="FFFFFF"/>
+                    <a:lnR w="9525" cap="flat" cmpd="sng" algn="ctr">
+                      <a:solidFill>
+                        <a:srgbClr val="C0C0C0"/>
                       </a:solidFill>
                       <a:prstDash val="solid"/>
                       <a:round/>
                       <a:headEnd type="none" w="med" len="med"/>
                       <a:tailEnd type="none" w="med" len="med"/>
                     </a:lnR>
-                    <a:lnT w="0" cap="flat" cmpd="sng" algn="ctr">
-                      <a:solidFill>
-                        <a:srgbClr val="FFFFFF"/>
+                    <a:lnT w="9525" cap="flat" cmpd="sng" algn="ctr">
+                      <a:solidFill>
+                        <a:srgbClr val="C0C0C0"/>
                       </a:solidFill>
                       <a:prstDash val="solid"/>
                       <a:round/>
                       <a:headEnd type="none" w="med" len="med"/>
                       <a:tailEnd type="none" w="med" len="med"/>
                     </a:lnT>
-                    <a:lnB w="6350" cap="flat" cmpd="sng" algn="ctr">
-                      <a:solidFill>
-                        <a:srgbClr val="E8E8E8"/>
+                    <a:lnB w="9525" cap="flat" cmpd="sng" algn="ctr">
+                      <a:solidFill>
+                        <a:srgbClr val="C0C0C0"/>
                       </a:solidFill>
                       <a:prstDash val="solid"/>
                       <a:round/>
                       <a:headEnd type="none" w="med" len="med"/>
                       <a:tailEnd type="none" w="med" len="med"/>
                     </a:lnB>
+                    <a:solidFill>
+                      <a:srgbClr val="FFFFFF"/>
+                    </a:solidFill>
                   </a:tcPr>
                 </a:tc>
                 <a:tc>
@@ -2794,64 +2277,179 @@
                     <a:bodyPr/>
                     <a:lstStyle/>
                     <a:p>
-                      <a:pPr algn="ctr" indent="0" marL="0">
-                        <a:buNone/>
-                      </a:pPr>
-                      <a:r>
-                        <a:rPr lang="en-US" sz="800" dirty="0">
-                          <a:solidFill>
-                            <a:srgbClr val="404040"/>
-                          </a:solidFill>
-                          <a:latin typeface="Calibri" pitchFamily="34" charset="0"/>
-                          <a:ea typeface="Calibri" pitchFamily="34" charset="-122"/>
-                          <a:cs typeface="Calibri" pitchFamily="34" charset="-120"/>
-                        </a:rPr>
-                        <a:t>3-4</a:t>
-                      </a:r>
-                      <a:endParaRPr lang="en-US" sz="800" dirty="0">
+                      <a:pPr indent="0" marL="0">
+                        <a:buNone/>
+                      </a:pPr>
+                      <a:r>
+                        <a:rPr lang="en-US" sz="900" dirty="0">
+                          <a:solidFill>
+                            <a:srgbClr val="333333"/>
+                          </a:solidFill>
+                          <a:latin typeface="Calibri" pitchFamily="34" charset="0"/>
+                          <a:ea typeface="Calibri" pitchFamily="34" charset="-122"/>
+                          <a:cs typeface="Calibri" pitchFamily="34" charset="-120"/>
+                        </a:rPr>
+                        <a:t>Tesla, GM, Ford,</a:t>
+                      </a:r>
+                      <a:endParaRPr lang="en-US" sz="900" dirty="0">
+                        <a:latin typeface="Calibri" charset="0"/>
+                        <a:ea typeface="Calibri" charset="0"/>
+                        <a:cs typeface="Calibri" charset="0"/>
+                      </a:endParaRPr>
+                    </a:p>
+                    <a:p>
+                      <a:pPr indent="0" marL="0">
+                        <a:buNone/>
+                      </a:pPr>
+                      <a:r>
+                        <a:rPr lang="en-US" sz="900" dirty="0">
+                          <a:solidFill>
+                            <a:srgbClr val="333333"/>
+                          </a:solidFill>
+                          <a:latin typeface="Calibri" pitchFamily="34" charset="0"/>
+                          <a:ea typeface="Calibri" pitchFamily="34" charset="-122"/>
+                          <a:cs typeface="Calibri" pitchFamily="34" charset="-120"/>
+                        </a:rPr>
+                        <a:t>Hyundai, Rivian</a:t>
+                      </a:r>
+                      <a:endParaRPr lang="en-US" sz="900" dirty="0">
                         <a:latin typeface="Calibri" charset="0"/>
                         <a:ea typeface="Calibri" charset="0"/>
                         <a:cs typeface="Calibri" charset="0"/>
                       </a:endParaRPr>
                     </a:p>
                   </a:txBody>
-                  <a:tcPr marL="50800" marR="50800" marT="25400" marB="25400" anchor="ctr">
-                    <a:lnL w="0" cap="flat" cmpd="sng" algn="ctr">
-                      <a:solidFill>
-                        <a:srgbClr val="FFFFFF"/>
+                  <a:tcPr marL="91440" marR="91440" marT="45720" marB="45720" anchor="ctr">
+                    <a:lnL w="9525" cap="flat" cmpd="sng" algn="ctr">
+                      <a:solidFill>
+                        <a:srgbClr val="C0C0C0"/>
                       </a:solidFill>
                       <a:prstDash val="solid"/>
                       <a:round/>
                       <a:headEnd type="none" w="med" len="med"/>
                       <a:tailEnd type="none" w="med" len="med"/>
                     </a:lnL>
-                    <a:lnR w="0" cap="flat" cmpd="sng" algn="ctr">
-                      <a:solidFill>
-                        <a:srgbClr val="FFFFFF"/>
+                    <a:lnR w="9525" cap="flat" cmpd="sng" algn="ctr">
+                      <a:solidFill>
+                        <a:srgbClr val="C0C0C0"/>
                       </a:solidFill>
                       <a:prstDash val="solid"/>
                       <a:round/>
                       <a:headEnd type="none" w="med" len="med"/>
                       <a:tailEnd type="none" w="med" len="med"/>
                     </a:lnR>
-                    <a:lnT w="0" cap="flat" cmpd="sng" algn="ctr">
-                      <a:solidFill>
-                        <a:srgbClr val="FFFFFF"/>
+                    <a:lnT w="9525" cap="flat" cmpd="sng" algn="ctr">
+                      <a:solidFill>
+                        <a:srgbClr val="C0C0C0"/>
                       </a:solidFill>
                       <a:prstDash val="solid"/>
                       <a:round/>
                       <a:headEnd type="none" w="med" len="med"/>
                       <a:tailEnd type="none" w="med" len="med"/>
                     </a:lnT>
-                    <a:lnB w="6350" cap="flat" cmpd="sng" algn="ctr">
-                      <a:solidFill>
-                        <a:srgbClr val="E8E8E8"/>
+                    <a:lnB w="9525" cap="flat" cmpd="sng" algn="ctr">
+                      <a:solidFill>
+                        <a:srgbClr val="C0C0C0"/>
                       </a:solidFill>
                       <a:prstDash val="solid"/>
                       <a:round/>
                       <a:headEnd type="none" w="med" len="med"/>
                       <a:tailEnd type="none" w="med" len="med"/>
                     </a:lnB>
+                    <a:solidFill>
+                      <a:srgbClr val="FFFFFF"/>
+                    </a:solidFill>
+                  </a:tcPr>
+                </a:tc>
+              </a:tr>
+              <a:tr h="457200">
+                <a:tc>
+                  <a:txBody>
+                    <a:bodyPr/>
+                    <a:lstStyle/>
+                    <a:p>
+                      <a:pPr indent="0" marL="0">
+                        <a:buNone/>
+                      </a:pPr>
+                      <a:r>
+                        <a:rPr lang="en-US" sz="900" b="1" dirty="0">
+                          <a:solidFill>
+                            <a:srgbClr val="000000"/>
+                          </a:solidFill>
+                          <a:latin typeface="Calibri" pitchFamily="34" charset="0"/>
+                          <a:ea typeface="Calibri" pitchFamily="34" charset="-122"/>
+                          <a:cs typeface="Calibri" pitchFamily="34" charset="-120"/>
+                        </a:rPr>
+                        <a:t>Government</a:t>
+                      </a:r>
+                      <a:endParaRPr lang="en-US" sz="900" dirty="0">
+                        <a:latin typeface="Calibri" charset="0"/>
+                        <a:ea typeface="Calibri" charset="0"/>
+                        <a:cs typeface="Calibri" charset="0"/>
+                      </a:endParaRPr>
+                    </a:p>
+                    <a:p>
+                      <a:pPr indent="0" marL="0">
+                        <a:buNone/>
+                      </a:pPr>
+                      <a:r>
+                        <a:rPr lang="en-US" sz="900" b="1" dirty="0">
+                          <a:solidFill>
+                            <a:srgbClr val="000000"/>
+                          </a:solidFill>
+                          <a:latin typeface="Calibri" pitchFamily="34" charset="0"/>
+                          <a:ea typeface="Calibri" pitchFamily="34" charset="-122"/>
+                          <a:cs typeface="Calibri" pitchFamily="34" charset="-120"/>
+                        </a:rPr>
+                        <a:t>incentives</a:t>
+                      </a:r>
+                      <a:endParaRPr lang="en-US" sz="900" dirty="0">
+                        <a:latin typeface="Calibri" charset="0"/>
+                        <a:ea typeface="Calibri" charset="0"/>
+                        <a:cs typeface="Calibri" charset="0"/>
+                      </a:endParaRPr>
+                    </a:p>
+                  </a:txBody>
+                  <a:tcPr marL="91440" marR="91440" marT="45720" marB="45720" anchor="ctr">
+                    <a:lnL w="9525" cap="flat" cmpd="sng" algn="ctr">
+                      <a:solidFill>
+                        <a:srgbClr val="C0C0C0"/>
+                      </a:solidFill>
+                      <a:prstDash val="solid"/>
+                      <a:round/>
+                      <a:headEnd type="none" w="med" len="med"/>
+                      <a:tailEnd type="none" w="med" len="med"/>
+                    </a:lnL>
+                    <a:lnR w="9525" cap="flat" cmpd="sng" algn="ctr">
+                      <a:solidFill>
+                        <a:srgbClr val="C0C0C0"/>
+                      </a:solidFill>
+                      <a:prstDash val="solid"/>
+                      <a:round/>
+                      <a:headEnd type="none" w="med" len="med"/>
+                      <a:tailEnd type="none" w="med" len="med"/>
+                    </a:lnR>
+                    <a:lnT w="9525" cap="flat" cmpd="sng" algn="ctr">
+                      <a:solidFill>
+                        <a:srgbClr val="C0C0C0"/>
+                      </a:solidFill>
+                      <a:prstDash val="solid"/>
+                      <a:round/>
+                      <a:headEnd type="none" w="med" len="med"/>
+                      <a:tailEnd type="none" w="med" len="med"/>
+                    </a:lnT>
+                    <a:lnB w="9525" cap="flat" cmpd="sng" algn="ctr">
+                      <a:solidFill>
+                        <a:srgbClr val="C0C0C0"/>
+                      </a:solidFill>
+                      <a:prstDash val="solid"/>
+                      <a:round/>
+                      <a:headEnd type="none" w="med" len="med"/>
+                      <a:tailEnd type="none" w="med" len="med"/>
+                    </a:lnB>
+                    <a:solidFill>
+                      <a:srgbClr val="FFFFFF"/>
+                    </a:solidFill>
                   </a:tcPr>
                 </a:tc>
                 <a:tc>
@@ -2859,64 +2457,109 @@
                     <a:bodyPr/>
                     <a:lstStyle/>
                     <a:p>
-                      <a:pPr algn="ctr" indent="0" marL="0">
-                        <a:buNone/>
-                      </a:pPr>
-                      <a:r>
-                        <a:rPr lang="en-US" sz="800" dirty="0">
-                          <a:solidFill>
-                            <a:srgbClr val="404040"/>
-                          </a:solidFill>
-                          <a:latin typeface="Calibri" pitchFamily="34" charset="0"/>
-                          <a:ea typeface="Calibri" pitchFamily="34" charset="-122"/>
-                          <a:cs typeface="Calibri" pitchFamily="34" charset="-120"/>
-                        </a:rPr>
-                        <a:t>2.5-3</a:t>
-                      </a:r>
-                      <a:endParaRPr lang="en-US" sz="800" dirty="0">
+                      <a:pPr indent="0" marL="0">
+                        <a:buNone/>
+                      </a:pPr>
+                      <a:r>
+                        <a:rPr lang="en-US" sz="900" dirty="0">
+                          <a:solidFill>
+                            <a:srgbClr val="333333"/>
+                          </a:solidFill>
+                          <a:latin typeface="Calibri" pitchFamily="34" charset="0"/>
+                          <a:ea typeface="Calibri" pitchFamily="34" charset="-122"/>
+                          <a:cs typeface="Calibri" pitchFamily="34" charset="-120"/>
+                        </a:rPr>
+                        <a:t>Purchase subsidies phasing</a:t>
+                      </a:r>
+                      <a:endParaRPr lang="en-US" sz="900" dirty="0">
+                        <a:latin typeface="Calibri" charset="0"/>
+                        <a:ea typeface="Calibri" charset="0"/>
+                        <a:cs typeface="Calibri" charset="0"/>
+                      </a:endParaRPr>
+                    </a:p>
+                    <a:p>
+                      <a:pPr indent="0" marL="0">
+                        <a:buNone/>
+                      </a:pPr>
+                      <a:r>
+                        <a:rPr lang="en-US" sz="900" dirty="0">
+                          <a:solidFill>
+                            <a:srgbClr val="333333"/>
+                          </a:solidFill>
+                          <a:latin typeface="Calibri" pitchFamily="34" charset="0"/>
+                          <a:ea typeface="Calibri" pitchFamily="34" charset="-122"/>
+                          <a:cs typeface="Calibri" pitchFamily="34" charset="-120"/>
+                        </a:rPr>
+                        <a:t>out; NEV credit system;</a:t>
+                      </a:r>
+                      <a:endParaRPr lang="en-US" sz="900" dirty="0">
+                        <a:latin typeface="Calibri" charset="0"/>
+                        <a:ea typeface="Calibri" charset="0"/>
+                        <a:cs typeface="Calibri" charset="0"/>
+                      </a:endParaRPr>
+                    </a:p>
+                    <a:p>
+                      <a:pPr indent="0" marL="0">
+                        <a:buNone/>
+                      </a:pPr>
+                      <a:r>
+                        <a:rPr lang="en-US" sz="900" dirty="0">
+                          <a:solidFill>
+                            <a:srgbClr val="333333"/>
+                          </a:solidFill>
+                          <a:latin typeface="Calibri" pitchFamily="34" charset="0"/>
+                          <a:ea typeface="Calibri" pitchFamily="34" charset="-122"/>
+                          <a:cs typeface="Calibri" pitchFamily="34" charset="-120"/>
+                        </a:rPr>
+                        <a:t>manufacturing tax breaks</a:t>
+                      </a:r>
+                      <a:endParaRPr lang="en-US" sz="900" dirty="0">
                         <a:latin typeface="Calibri" charset="0"/>
                         <a:ea typeface="Calibri" charset="0"/>
                         <a:cs typeface="Calibri" charset="0"/>
                       </a:endParaRPr>
                     </a:p>
                   </a:txBody>
-                  <a:tcPr marL="50800" marR="50800" marT="25400" marB="25400" anchor="ctr">
-                    <a:lnL w="0" cap="flat" cmpd="sng" algn="ctr">
-                      <a:solidFill>
-                        <a:srgbClr val="FFFFFF"/>
+                  <a:tcPr marL="91440" marR="91440" marT="45720" marB="45720" anchor="ctr">
+                    <a:lnL w="9525" cap="flat" cmpd="sng" algn="ctr">
+                      <a:solidFill>
+                        <a:srgbClr val="C0C0C0"/>
                       </a:solidFill>
                       <a:prstDash val="solid"/>
                       <a:round/>
                       <a:headEnd type="none" w="med" len="med"/>
                       <a:tailEnd type="none" w="med" len="med"/>
                     </a:lnL>
-                    <a:lnR w="0" cap="flat" cmpd="sng" algn="ctr">
-                      <a:solidFill>
-                        <a:srgbClr val="FFFFFF"/>
+                    <a:lnR w="9525" cap="flat" cmpd="sng" algn="ctr">
+                      <a:solidFill>
+                        <a:srgbClr val="C0C0C0"/>
                       </a:solidFill>
                       <a:prstDash val="solid"/>
                       <a:round/>
                       <a:headEnd type="none" w="med" len="med"/>
                       <a:tailEnd type="none" w="med" len="med"/>
                     </a:lnR>
-                    <a:lnT w="0" cap="flat" cmpd="sng" algn="ctr">
-                      <a:solidFill>
-                        <a:srgbClr val="FFFFFF"/>
+                    <a:lnT w="9525" cap="flat" cmpd="sng" algn="ctr">
+                      <a:solidFill>
+                        <a:srgbClr val="C0C0C0"/>
                       </a:solidFill>
                       <a:prstDash val="solid"/>
                       <a:round/>
                       <a:headEnd type="none" w="med" len="med"/>
                       <a:tailEnd type="none" w="med" len="med"/>
                     </a:lnT>
-                    <a:lnB w="6350" cap="flat" cmpd="sng" algn="ctr">
-                      <a:solidFill>
-                        <a:srgbClr val="E8E8E8"/>
+                    <a:lnB w="9525" cap="flat" cmpd="sng" algn="ctr">
+                      <a:solidFill>
+                        <a:srgbClr val="C0C0C0"/>
                       </a:solidFill>
                       <a:prstDash val="solid"/>
                       <a:round/>
                       <a:headEnd type="none" w="med" len="med"/>
                       <a:tailEnd type="none" w="med" len="med"/>
                     </a:lnB>
+                    <a:solidFill>
+                      <a:srgbClr val="FFFFFF"/>
+                    </a:solidFill>
                   </a:tcPr>
                 </a:tc>
                 <a:tc>
@@ -2924,64 +2567,109 @@
                     <a:bodyPr/>
                     <a:lstStyle/>
                     <a:p>
-                      <a:pPr algn="ctr" indent="0" marL="0">
-                        <a:buNone/>
-                      </a:pPr>
-                      <a:r>
-                        <a:rPr lang="en-US" sz="800" dirty="0">
-                          <a:solidFill>
-                            <a:srgbClr val="404040"/>
-                          </a:solidFill>
-                          <a:latin typeface="Calibri" pitchFamily="34" charset="0"/>
-                          <a:ea typeface="Calibri" pitchFamily="34" charset="-122"/>
-                          <a:cs typeface="Calibri" pitchFamily="34" charset="-120"/>
-                        </a:rPr>
-                        <a:t>2.0</a:t>
-                      </a:r>
-                      <a:endParaRPr lang="en-US" sz="800" dirty="0">
+                      <a:pPr indent="0" marL="0">
+                        <a:buNone/>
+                      </a:pPr>
+                      <a:r>
+                        <a:rPr lang="en-US" sz="900" dirty="0">
+                          <a:solidFill>
+                            <a:srgbClr val="333333"/>
+                          </a:solidFill>
+                          <a:latin typeface="Calibri" pitchFamily="34" charset="0"/>
+                          <a:ea typeface="Calibri" pitchFamily="34" charset="-122"/>
+                          <a:cs typeface="Calibri" pitchFamily="34" charset="-120"/>
+                        </a:rPr>
+                        <a:t>EU CO2 fleet targets;</a:t>
+                      </a:r>
+                      <a:endParaRPr lang="en-US" sz="900" dirty="0">
+                        <a:latin typeface="Calibri" charset="0"/>
+                        <a:ea typeface="Calibri" charset="0"/>
+                        <a:cs typeface="Calibri" charset="0"/>
+                      </a:endParaRPr>
+                    </a:p>
+                    <a:p>
+                      <a:pPr indent="0" marL="0">
+                        <a:buNone/>
+                      </a:pPr>
+                      <a:r>
+                        <a:rPr lang="en-US" sz="900" dirty="0">
+                          <a:solidFill>
+                            <a:srgbClr val="333333"/>
+                          </a:solidFill>
+                          <a:latin typeface="Calibri" pitchFamily="34" charset="0"/>
+                          <a:ea typeface="Calibri" pitchFamily="34" charset="-122"/>
+                          <a:cs typeface="Calibri" pitchFamily="34" charset="-120"/>
+                        </a:rPr>
+                        <a:t>national subsidies</a:t>
+                      </a:r>
+                      <a:endParaRPr lang="en-US" sz="900" dirty="0">
+                        <a:latin typeface="Calibri" charset="0"/>
+                        <a:ea typeface="Calibri" charset="0"/>
+                        <a:cs typeface="Calibri" charset="0"/>
+                      </a:endParaRPr>
+                    </a:p>
+                    <a:p>
+                      <a:pPr indent="0" marL="0">
+                        <a:buNone/>
+                      </a:pPr>
+                      <a:r>
+                        <a:rPr lang="en-US" sz="900" dirty="0">
+                          <a:solidFill>
+                            <a:srgbClr val="333333"/>
+                          </a:solidFill>
+                          <a:latin typeface="Calibri" pitchFamily="34" charset="0"/>
+                          <a:ea typeface="Calibri" pitchFamily="34" charset="-122"/>
+                          <a:cs typeface="Calibri" pitchFamily="34" charset="-120"/>
+                        </a:rPr>
+                        <a:t>(varies by country)</a:t>
+                      </a:r>
+                      <a:endParaRPr lang="en-US" sz="900" dirty="0">
                         <a:latin typeface="Calibri" charset="0"/>
                         <a:ea typeface="Calibri" charset="0"/>
                         <a:cs typeface="Calibri" charset="0"/>
                       </a:endParaRPr>
                     </a:p>
                   </a:txBody>
-                  <a:tcPr marL="50800" marR="50800" marT="25400" marB="25400" anchor="ctr">
-                    <a:lnL w="0" cap="flat" cmpd="sng" algn="ctr">
-                      <a:solidFill>
-                        <a:srgbClr val="FFFFFF"/>
+                  <a:tcPr marL="91440" marR="91440" marT="45720" marB="45720" anchor="ctr">
+                    <a:lnL w="9525" cap="flat" cmpd="sng" algn="ctr">
+                      <a:solidFill>
+                        <a:srgbClr val="C0C0C0"/>
                       </a:solidFill>
                       <a:prstDash val="solid"/>
                       <a:round/>
                       <a:headEnd type="none" w="med" len="med"/>
                       <a:tailEnd type="none" w="med" len="med"/>
                     </a:lnL>
-                    <a:lnR w="0" cap="flat" cmpd="sng" algn="ctr">
-                      <a:solidFill>
-                        <a:srgbClr val="FFFFFF"/>
+                    <a:lnR w="9525" cap="flat" cmpd="sng" algn="ctr">
+                      <a:solidFill>
+                        <a:srgbClr val="C0C0C0"/>
                       </a:solidFill>
                       <a:prstDash val="solid"/>
                       <a:round/>
                       <a:headEnd type="none" w="med" len="med"/>
                       <a:tailEnd type="none" w="med" len="med"/>
                     </a:lnR>
-                    <a:lnT w="0" cap="flat" cmpd="sng" algn="ctr">
-                      <a:solidFill>
-                        <a:srgbClr val="FFFFFF"/>
+                    <a:lnT w="9525" cap="flat" cmpd="sng" algn="ctr">
+                      <a:solidFill>
+                        <a:srgbClr val="C0C0C0"/>
                       </a:solidFill>
                       <a:prstDash val="solid"/>
                       <a:round/>
                       <a:headEnd type="none" w="med" len="med"/>
                       <a:tailEnd type="none" w="med" len="med"/>
                     </a:lnT>
-                    <a:lnB w="6350" cap="flat" cmpd="sng" algn="ctr">
-                      <a:solidFill>
-                        <a:srgbClr val="E8E8E8"/>
+                    <a:lnB w="9525" cap="flat" cmpd="sng" algn="ctr">
+                      <a:solidFill>
+                        <a:srgbClr val="C0C0C0"/>
                       </a:solidFill>
                       <a:prstDash val="solid"/>
                       <a:round/>
                       <a:headEnd type="none" w="med" len="med"/>
                       <a:tailEnd type="none" w="med" len="med"/>
                     </a:lnB>
+                    <a:solidFill>
+                      <a:srgbClr val="FFFFFF"/>
+                    </a:solidFill>
                   </a:tcPr>
                 </a:tc>
                 <a:tc>
@@ -2989,131 +2677,200 @@
                     <a:bodyPr/>
                     <a:lstStyle/>
                     <a:p>
-                      <a:pPr algn="ctr" indent="0" marL="0">
-                        <a:buNone/>
-                      </a:pPr>
-                      <a:r>
-                        <a:rPr lang="en-US" sz="800" dirty="0">
-                          <a:solidFill>
-                            <a:srgbClr val="404040"/>
-                          </a:solidFill>
-                          <a:latin typeface="Calibri" pitchFamily="34" charset="0"/>
-                          <a:ea typeface="Calibri" pitchFamily="34" charset="-122"/>
-                          <a:cs typeface="Calibri" pitchFamily="34" charset="-120"/>
-                        </a:rPr>
-                        <a:t>1.5</a:t>
-                      </a:r>
-                      <a:endParaRPr lang="en-US" sz="800" dirty="0">
+                      <a:pPr indent="0" marL="0">
+                        <a:buNone/>
+                      </a:pPr>
+                      <a:r>
+                        <a:rPr lang="en-US" sz="900" dirty="0">
+                          <a:solidFill>
+                            <a:srgbClr val="333333"/>
+                          </a:solidFill>
+                          <a:latin typeface="Calibri" pitchFamily="34" charset="0"/>
+                          <a:ea typeface="Calibri" pitchFamily="34" charset="-122"/>
+                          <a:cs typeface="Calibri" pitchFamily="34" charset="-120"/>
+                        </a:rPr>
+                        <a:t>$7,500 IRA tax credit;</a:t>
+                      </a:r>
+                      <a:endParaRPr lang="en-US" sz="900" dirty="0">
+                        <a:latin typeface="Calibri" charset="0"/>
+                        <a:ea typeface="Calibri" charset="0"/>
+                        <a:cs typeface="Calibri" charset="0"/>
+                      </a:endParaRPr>
+                    </a:p>
+                    <a:p>
+                      <a:pPr indent="0" marL="0">
+                        <a:buNone/>
+                      </a:pPr>
+                      <a:r>
+                        <a:rPr lang="en-US" sz="900" dirty="0">
+                          <a:solidFill>
+                            <a:srgbClr val="333333"/>
+                          </a:solidFill>
+                          <a:latin typeface="Calibri" pitchFamily="34" charset="0"/>
+                          <a:ea typeface="Calibri" pitchFamily="34" charset="-122"/>
+                          <a:cs typeface="Calibri" pitchFamily="34" charset="-120"/>
+                        </a:rPr>
+                        <a:t>state-level incentives;</a:t>
+                      </a:r>
+                      <a:endParaRPr lang="en-US" sz="900" dirty="0">
+                        <a:latin typeface="Calibri" charset="0"/>
+                        <a:ea typeface="Calibri" charset="0"/>
+                        <a:cs typeface="Calibri" charset="0"/>
+                      </a:endParaRPr>
+                    </a:p>
+                    <a:p>
+                      <a:pPr indent="0" marL="0">
+                        <a:buNone/>
+                      </a:pPr>
+                      <a:r>
+                        <a:rPr lang="en-US" sz="900" dirty="0">
+                          <a:solidFill>
+                            <a:srgbClr val="333333"/>
+                          </a:solidFill>
+                          <a:latin typeface="Calibri" pitchFamily="34" charset="0"/>
+                          <a:ea typeface="Calibri" pitchFamily="34" charset="-122"/>
+                          <a:cs typeface="Calibri" pitchFamily="34" charset="-120"/>
+                        </a:rPr>
+                        <a:t>charging infrastructure funds</a:t>
+                      </a:r>
+                      <a:endParaRPr lang="en-US" sz="900" dirty="0">
                         <a:latin typeface="Calibri" charset="0"/>
                         <a:ea typeface="Calibri" charset="0"/>
                         <a:cs typeface="Calibri" charset="0"/>
                       </a:endParaRPr>
                     </a:p>
                   </a:txBody>
-                  <a:tcPr marL="50800" marR="50800" marT="25400" marB="25400" anchor="ctr">
-                    <a:lnL w="0" cap="flat" cmpd="sng" algn="ctr">
-                      <a:solidFill>
-                        <a:srgbClr val="FFFFFF"/>
+                  <a:tcPr marL="91440" marR="91440" marT="45720" marB="45720" anchor="ctr">
+                    <a:lnL w="9525" cap="flat" cmpd="sng" algn="ctr">
+                      <a:solidFill>
+                        <a:srgbClr val="C0C0C0"/>
                       </a:solidFill>
                       <a:prstDash val="solid"/>
                       <a:round/>
                       <a:headEnd type="none" w="med" len="med"/>
                       <a:tailEnd type="none" w="med" len="med"/>
                     </a:lnL>
-                    <a:lnR w="0" cap="flat" cmpd="sng" algn="ctr">
-                      <a:solidFill>
-                        <a:srgbClr val="FFFFFF"/>
+                    <a:lnR w="9525" cap="flat" cmpd="sng" algn="ctr">
+                      <a:solidFill>
+                        <a:srgbClr val="C0C0C0"/>
                       </a:solidFill>
                       <a:prstDash val="solid"/>
                       <a:round/>
                       <a:headEnd type="none" w="med" len="med"/>
                       <a:tailEnd type="none" w="med" len="med"/>
                     </a:lnR>
-                    <a:lnT w="0" cap="flat" cmpd="sng" algn="ctr">
-                      <a:solidFill>
-                        <a:srgbClr val="FFFFFF"/>
+                    <a:lnT w="9525" cap="flat" cmpd="sng" algn="ctr">
+                      <a:solidFill>
+                        <a:srgbClr val="C0C0C0"/>
                       </a:solidFill>
                       <a:prstDash val="solid"/>
                       <a:round/>
                       <a:headEnd type="none" w="med" len="med"/>
                       <a:tailEnd type="none" w="med" len="med"/>
                     </a:lnT>
-                    <a:lnB w="6350" cap="flat" cmpd="sng" algn="ctr">
-                      <a:solidFill>
-                        <a:srgbClr val="E8E8E8"/>
+                    <a:lnB w="9525" cap="flat" cmpd="sng" algn="ctr">
+                      <a:solidFill>
+                        <a:srgbClr val="C0C0C0"/>
                       </a:solidFill>
                       <a:prstDash val="solid"/>
                       <a:round/>
                       <a:headEnd type="none" w="med" len="med"/>
                       <a:tailEnd type="none" w="med" len="med"/>
                     </a:lnB>
+                    <a:solidFill>
+                      <a:srgbClr val="FFFFFF"/>
+                    </a:solidFill>
                   </a:tcPr>
                 </a:tc>
               </a:tr>
-              <a:tr h="256032">
+              <a:tr h="457200">
                 <a:tc>
                   <a:txBody>
                     <a:bodyPr/>
                     <a:lstStyle/>
                     <a:p>
-                      <a:pPr algn="l" indent="0" marL="0">
-                        <a:buNone/>
-                      </a:pPr>
-                      <a:r>
-                        <a:rPr lang="en-US" sz="850" b="1" dirty="0">
-                          <a:solidFill>
-                            <a:srgbClr val="333333"/>
-                          </a:solidFill>
-                          <a:latin typeface="Calibri" pitchFamily="34" charset="0"/>
-                          <a:ea typeface="Calibri" pitchFamily="34" charset="-122"/>
-                          <a:cs typeface="Calibri" pitchFamily="34" charset="-120"/>
-                        </a:rPr>
-                        <a:t>CO2 reduction (Mt/yr)</a:t>
-                      </a:r>
-                      <a:endParaRPr lang="en-US" sz="850" dirty="0">
+                      <a:pPr indent="0" marL="0">
+                        <a:buNone/>
+                      </a:pPr>
+                      <a:r>
+                        <a:rPr lang="en-US" sz="900" b="1" dirty="0">
+                          <a:solidFill>
+                            <a:srgbClr val="000000"/>
+                          </a:solidFill>
+                          <a:latin typeface="Calibri" pitchFamily="34" charset="0"/>
+                          <a:ea typeface="Calibri" pitchFamily="34" charset="-122"/>
+                          <a:cs typeface="Calibri" pitchFamily="34" charset="-120"/>
+                        </a:rPr>
+                        <a:t>Charging</a:t>
+                      </a:r>
+                      <a:endParaRPr lang="en-US" sz="900" dirty="0">
+                        <a:latin typeface="Calibri" charset="0"/>
+                        <a:ea typeface="Calibri" charset="0"/>
+                        <a:cs typeface="Calibri" charset="0"/>
+                      </a:endParaRPr>
+                    </a:p>
+                    <a:p>
+                      <a:pPr indent="0" marL="0">
+                        <a:buNone/>
+                      </a:pPr>
+                      <a:r>
+                        <a:rPr lang="en-US" sz="900" b="1" dirty="0">
+                          <a:solidFill>
+                            <a:srgbClr val="000000"/>
+                          </a:solidFill>
+                          <a:latin typeface="Calibri" pitchFamily="34" charset="0"/>
+                          <a:ea typeface="Calibri" pitchFamily="34" charset="-122"/>
+                          <a:cs typeface="Calibri" pitchFamily="34" charset="-120"/>
+                        </a:rPr>
+                        <a:t>infrastructure</a:t>
+                      </a:r>
+                      <a:endParaRPr lang="en-US" sz="900" dirty="0">
                         <a:latin typeface="Calibri" charset="0"/>
                         <a:ea typeface="Calibri" charset="0"/>
                         <a:cs typeface="Calibri" charset="0"/>
                       </a:endParaRPr>
                     </a:p>
                   </a:txBody>
-                  <a:tcPr marL="50800" marR="50800" marT="25400" marB="25400" anchor="ctr">
-                    <a:lnL w="0" cap="flat" cmpd="sng" algn="ctr">
-                      <a:solidFill>
-                        <a:srgbClr val="FFFFFF"/>
+                  <a:tcPr marL="91440" marR="91440" marT="45720" marB="45720" anchor="ctr">
+                    <a:lnL w="9525" cap="flat" cmpd="sng" algn="ctr">
+                      <a:solidFill>
+                        <a:srgbClr val="C0C0C0"/>
                       </a:solidFill>
                       <a:prstDash val="solid"/>
                       <a:round/>
                       <a:headEnd type="none" w="med" len="med"/>
                       <a:tailEnd type="none" w="med" len="med"/>
                     </a:lnL>
-                    <a:lnR w="0" cap="flat" cmpd="sng" algn="ctr">
-                      <a:solidFill>
-                        <a:srgbClr val="FFFFFF"/>
+                    <a:lnR w="9525" cap="flat" cmpd="sng" algn="ctr">
+                      <a:solidFill>
+                        <a:srgbClr val="C0C0C0"/>
                       </a:solidFill>
                       <a:prstDash val="solid"/>
                       <a:round/>
                       <a:headEnd type="none" w="med" len="med"/>
                       <a:tailEnd type="none" w="med" len="med"/>
                     </a:lnR>
-                    <a:lnT w="0" cap="flat" cmpd="sng" algn="ctr">
-                      <a:solidFill>
-                        <a:srgbClr val="FFFFFF"/>
+                    <a:lnT w="9525" cap="flat" cmpd="sng" algn="ctr">
+                      <a:solidFill>
+                        <a:srgbClr val="C0C0C0"/>
                       </a:solidFill>
                       <a:prstDash val="solid"/>
                       <a:round/>
                       <a:headEnd type="none" w="med" len="med"/>
                       <a:tailEnd type="none" w="med" len="med"/>
                     </a:lnT>
-                    <a:lnB w="12700" cap="flat" cmpd="sng" algn="ctr">
-                      <a:solidFill>
-                        <a:srgbClr val="0C2340"/>
+                    <a:lnB w="9525" cap="flat" cmpd="sng" algn="ctr">
+                      <a:solidFill>
+                        <a:srgbClr val="C0C0C0"/>
                       </a:solidFill>
                       <a:prstDash val="solid"/>
                       <a:round/>
                       <a:headEnd type="none" w="med" len="med"/>
                       <a:tailEnd type="none" w="med" len="med"/>
                     </a:lnB>
+                    <a:solidFill>
+                      <a:srgbClr val="FFFFFF"/>
+                    </a:solidFill>
                   </a:tcPr>
                 </a:tc>
                 <a:tc>
@@ -3121,64 +2878,109 @@
                     <a:bodyPr/>
                     <a:lstStyle/>
                     <a:p>
-                      <a:pPr algn="ctr" indent="0" marL="0">
-                        <a:buNone/>
-                      </a:pPr>
-                      <a:r>
-                        <a:rPr lang="en-US" sz="800" dirty="0">
-                          <a:solidFill>
-                            <a:srgbClr val="404040"/>
-                          </a:solidFill>
-                          <a:latin typeface="Calibri" pitchFamily="34" charset="0"/>
-                          <a:ea typeface="Calibri" pitchFamily="34" charset="-122"/>
-                          <a:cs typeface="Calibri" pitchFamily="34" charset="-120"/>
-                        </a:rPr>
-                        <a:t>0.5</a:t>
-                      </a:r>
-                      <a:endParaRPr lang="en-US" sz="800" dirty="0">
+                      <a:pPr indent="0" marL="0">
+                        <a:buNone/>
+                      </a:pPr>
+                      <a:r>
+                        <a:rPr lang="en-US" sz="900" dirty="0">
+                          <a:solidFill>
+                            <a:srgbClr val="333333"/>
+                          </a:solidFill>
+                          <a:latin typeface="Calibri" pitchFamily="34" charset="0"/>
+                          <a:ea typeface="Calibri" pitchFamily="34" charset="-122"/>
+                          <a:cs typeface="Calibri" pitchFamily="34" charset="-120"/>
+                        </a:rPr>
+                        <a:t>~2.7M public chargers</a:t>
+                      </a:r>
+                      <a:endParaRPr lang="en-US" sz="900" dirty="0">
+                        <a:latin typeface="Calibri" charset="0"/>
+                        <a:ea typeface="Calibri" charset="0"/>
+                        <a:cs typeface="Calibri" charset="0"/>
+                      </a:endParaRPr>
+                    </a:p>
+                    <a:p>
+                      <a:pPr indent="0" marL="0">
+                        <a:buNone/>
+                      </a:pPr>
+                      <a:r>
+                        <a:rPr lang="en-US" sz="900" dirty="0">
+                          <a:solidFill>
+                            <a:srgbClr val="333333"/>
+                          </a:solidFill>
+                          <a:latin typeface="Calibri" pitchFamily="34" charset="0"/>
+                          <a:ea typeface="Calibri" pitchFamily="34" charset="-122"/>
+                          <a:cs typeface="Calibri" pitchFamily="34" charset="-120"/>
+                        </a:rPr>
+                        <a:t>(global leader);</a:t>
+                      </a:r>
+                      <a:endParaRPr lang="en-US" sz="900" dirty="0">
+                        <a:latin typeface="Calibri" charset="0"/>
+                        <a:ea typeface="Calibri" charset="0"/>
+                        <a:cs typeface="Calibri" charset="0"/>
+                      </a:endParaRPr>
+                    </a:p>
+                    <a:p>
+                      <a:pPr indent="0" marL="0">
+                        <a:buNone/>
+                      </a:pPr>
+                      <a:r>
+                        <a:rPr lang="en-US" sz="900" dirty="0">
+                          <a:solidFill>
+                            <a:srgbClr val="333333"/>
+                          </a:solidFill>
+                          <a:latin typeface="Calibri" pitchFamily="34" charset="0"/>
+                          <a:ea typeface="Calibri" pitchFamily="34" charset="-122"/>
+                          <a:cs typeface="Calibri" pitchFamily="34" charset="-120"/>
+                        </a:rPr>
+                        <a:t>State Grid investment</a:t>
+                      </a:r>
+                      <a:endParaRPr lang="en-US" sz="900" dirty="0">
                         <a:latin typeface="Calibri" charset="0"/>
                         <a:ea typeface="Calibri" charset="0"/>
                         <a:cs typeface="Calibri" charset="0"/>
                       </a:endParaRPr>
                     </a:p>
                   </a:txBody>
-                  <a:tcPr marL="50800" marR="50800" marT="25400" marB="25400" anchor="ctr">
-                    <a:lnL w="0" cap="flat" cmpd="sng" algn="ctr">
-                      <a:solidFill>
-                        <a:srgbClr val="FFFFFF"/>
+                  <a:tcPr marL="91440" marR="91440" marT="45720" marB="45720" anchor="ctr">
+                    <a:lnL w="9525" cap="flat" cmpd="sng" algn="ctr">
+                      <a:solidFill>
+                        <a:srgbClr val="C0C0C0"/>
                       </a:solidFill>
                       <a:prstDash val="solid"/>
                       <a:round/>
                       <a:headEnd type="none" w="med" len="med"/>
                       <a:tailEnd type="none" w="med" len="med"/>
                     </a:lnL>
-                    <a:lnR w="0" cap="flat" cmpd="sng" algn="ctr">
-                      <a:solidFill>
-                        <a:srgbClr val="FFFFFF"/>
+                    <a:lnR w="9525" cap="flat" cmpd="sng" algn="ctr">
+                      <a:solidFill>
+                        <a:srgbClr val="C0C0C0"/>
                       </a:solidFill>
                       <a:prstDash val="solid"/>
                       <a:round/>
                       <a:headEnd type="none" w="med" len="med"/>
                       <a:tailEnd type="none" w="med" len="med"/>
                     </a:lnR>
-                    <a:lnT w="0" cap="flat" cmpd="sng" algn="ctr">
-                      <a:solidFill>
-                        <a:srgbClr val="FFFFFF"/>
+                    <a:lnT w="9525" cap="flat" cmpd="sng" algn="ctr">
+                      <a:solidFill>
+                        <a:srgbClr val="C0C0C0"/>
                       </a:solidFill>
                       <a:prstDash val="solid"/>
                       <a:round/>
                       <a:headEnd type="none" w="med" len="med"/>
                       <a:tailEnd type="none" w="med" len="med"/>
                     </a:lnT>
-                    <a:lnB w="12700" cap="flat" cmpd="sng" algn="ctr">
-                      <a:solidFill>
-                        <a:srgbClr val="0C2340"/>
+                    <a:lnB w="9525" cap="flat" cmpd="sng" algn="ctr">
+                      <a:solidFill>
+                        <a:srgbClr val="C0C0C0"/>
                       </a:solidFill>
                       <a:prstDash val="solid"/>
                       <a:round/>
                       <a:headEnd type="none" w="med" len="med"/>
                       <a:tailEnd type="none" w="med" len="med"/>
                     </a:lnB>
+                    <a:solidFill>
+                      <a:srgbClr val="FFFFFF"/>
+                    </a:solidFill>
                   </a:tcPr>
                 </a:tc>
                 <a:tc>
@@ -3186,64 +2988,109 @@
                     <a:bodyPr/>
                     <a:lstStyle/>
                     <a:p>
-                      <a:pPr algn="ctr" indent="0" marL="0">
-                        <a:buNone/>
-                      </a:pPr>
-                      <a:r>
-                        <a:rPr lang="en-US" sz="800" dirty="0">
-                          <a:solidFill>
-                            <a:srgbClr val="404040"/>
-                          </a:solidFill>
-                          <a:latin typeface="Calibri" pitchFamily="34" charset="0"/>
-                          <a:ea typeface="Calibri" pitchFamily="34" charset="-122"/>
-                          <a:cs typeface="Calibri" pitchFamily="34" charset="-120"/>
-                        </a:rPr>
-                        <a:t>2.0</a:t>
-                      </a:r>
-                      <a:endParaRPr lang="en-US" sz="800" dirty="0">
+                      <a:pPr indent="0" marL="0">
+                        <a:buNone/>
+                      </a:pPr>
+                      <a:r>
+                        <a:rPr lang="en-US" sz="900" dirty="0">
+                          <a:solidFill>
+                            <a:srgbClr val="333333"/>
+                          </a:solidFill>
+                          <a:latin typeface="Calibri" pitchFamily="34" charset="0"/>
+                          <a:ea typeface="Calibri" pitchFamily="34" charset="-122"/>
+                          <a:cs typeface="Calibri" pitchFamily="34" charset="-120"/>
+                        </a:rPr>
+                        <a:t>~630K public chargers;</a:t>
+                      </a:r>
+                      <a:endParaRPr lang="en-US" sz="900" dirty="0">
+                        <a:latin typeface="Calibri" charset="0"/>
+                        <a:ea typeface="Calibri" charset="0"/>
+                        <a:cs typeface="Calibri" charset="0"/>
+                      </a:endParaRPr>
+                    </a:p>
+                    <a:p>
+                      <a:pPr indent="0" marL="0">
+                        <a:buNone/>
+                      </a:pPr>
+                      <a:r>
+                        <a:rPr lang="en-US" sz="900" dirty="0">
+                          <a:solidFill>
+                            <a:srgbClr val="333333"/>
+                          </a:solidFill>
+                          <a:latin typeface="Calibri" pitchFamily="34" charset="0"/>
+                          <a:ea typeface="Calibri" pitchFamily="34" charset="-122"/>
+                          <a:cs typeface="Calibri" pitchFamily="34" charset="-120"/>
+                        </a:rPr>
+                        <a:t>EU mandate for highway</a:t>
+                      </a:r>
+                      <a:endParaRPr lang="en-US" sz="900" dirty="0">
+                        <a:latin typeface="Calibri" charset="0"/>
+                        <a:ea typeface="Calibri" charset="0"/>
+                        <a:cs typeface="Calibri" charset="0"/>
+                      </a:endParaRPr>
+                    </a:p>
+                    <a:p>
+                      <a:pPr indent="0" marL="0">
+                        <a:buNone/>
+                      </a:pPr>
+                      <a:r>
+                        <a:rPr lang="en-US" sz="900" dirty="0">
+                          <a:solidFill>
+                            <a:srgbClr val="333333"/>
+                          </a:solidFill>
+                          <a:latin typeface="Calibri" pitchFamily="34" charset="0"/>
+                          <a:ea typeface="Calibri" pitchFamily="34" charset="-122"/>
+                          <a:cs typeface="Calibri" pitchFamily="34" charset="-120"/>
+                        </a:rPr>
+                        <a:t>charging every 60 km</a:t>
+                      </a:r>
+                      <a:endParaRPr lang="en-US" sz="900" dirty="0">
                         <a:latin typeface="Calibri" charset="0"/>
                         <a:ea typeface="Calibri" charset="0"/>
                         <a:cs typeface="Calibri" charset="0"/>
                       </a:endParaRPr>
                     </a:p>
                   </a:txBody>
-                  <a:tcPr marL="50800" marR="50800" marT="25400" marB="25400" anchor="ctr">
-                    <a:lnL w="0" cap="flat" cmpd="sng" algn="ctr">
-                      <a:solidFill>
-                        <a:srgbClr val="FFFFFF"/>
+                  <a:tcPr marL="91440" marR="91440" marT="45720" marB="45720" anchor="ctr">
+                    <a:lnL w="9525" cap="flat" cmpd="sng" algn="ctr">
+                      <a:solidFill>
+                        <a:srgbClr val="C0C0C0"/>
                       </a:solidFill>
                       <a:prstDash val="solid"/>
                       <a:round/>
                       <a:headEnd type="none" w="med" len="med"/>
                       <a:tailEnd type="none" w="med" len="med"/>
                     </a:lnL>
-                    <a:lnR w="0" cap="flat" cmpd="sng" algn="ctr">
-                      <a:solidFill>
-                        <a:srgbClr val="FFFFFF"/>
+                    <a:lnR w="9525" cap="flat" cmpd="sng" algn="ctr">
+                      <a:solidFill>
+                        <a:srgbClr val="C0C0C0"/>
                       </a:solidFill>
                       <a:prstDash val="solid"/>
                       <a:round/>
                       <a:headEnd type="none" w="med" len="med"/>
                       <a:tailEnd type="none" w="med" len="med"/>
                     </a:lnR>
-                    <a:lnT w="0" cap="flat" cmpd="sng" algn="ctr">
-                      <a:solidFill>
-                        <a:srgbClr val="FFFFFF"/>
+                    <a:lnT w="9525" cap="flat" cmpd="sng" algn="ctr">
+                      <a:solidFill>
+                        <a:srgbClr val="C0C0C0"/>
                       </a:solidFill>
                       <a:prstDash val="solid"/>
                       <a:round/>
                       <a:headEnd type="none" w="med" len="med"/>
                       <a:tailEnd type="none" w="med" len="med"/>
                     </a:lnT>
-                    <a:lnB w="12700" cap="flat" cmpd="sng" algn="ctr">
-                      <a:solidFill>
-                        <a:srgbClr val="0C2340"/>
+                    <a:lnB w="9525" cap="flat" cmpd="sng" algn="ctr">
+                      <a:solidFill>
+                        <a:srgbClr val="C0C0C0"/>
                       </a:solidFill>
                       <a:prstDash val="solid"/>
                       <a:round/>
                       <a:headEnd type="none" w="med" len="med"/>
                       <a:tailEnd type="none" w="med" len="med"/>
                     </a:lnB>
+                    <a:solidFill>
+                      <a:srgbClr val="FFFFFF"/>
+                    </a:solidFill>
                   </a:tcPr>
                 </a:tc>
                 <a:tc>
@@ -3251,64 +3098,200 @@
                     <a:bodyPr/>
                     <a:lstStyle/>
                     <a:p>
-                      <a:pPr algn="ctr" indent="0" marL="0">
-                        <a:buNone/>
-                      </a:pPr>
-                      <a:r>
-                        <a:rPr lang="en-US" sz="800" dirty="0">
-                          <a:solidFill>
-                            <a:srgbClr val="404040"/>
-                          </a:solidFill>
-                          <a:latin typeface="Calibri" pitchFamily="34" charset="0"/>
-                          <a:ea typeface="Calibri" pitchFamily="34" charset="-122"/>
-                          <a:cs typeface="Calibri" pitchFamily="34" charset="-120"/>
-                        </a:rPr>
-                        <a:t>5.0</a:t>
-                      </a:r>
-                      <a:endParaRPr lang="en-US" sz="800" dirty="0">
+                      <a:pPr indent="0" marL="0">
+                        <a:buNone/>
+                      </a:pPr>
+                      <a:r>
+                        <a:rPr lang="en-US" sz="900" dirty="0">
+                          <a:solidFill>
+                            <a:srgbClr val="333333"/>
+                          </a:solidFill>
+                          <a:latin typeface="Calibri" pitchFamily="34" charset="0"/>
+                          <a:ea typeface="Calibri" pitchFamily="34" charset="-122"/>
+                          <a:cs typeface="Calibri" pitchFamily="34" charset="-120"/>
+                        </a:rPr>
+                        <a:t>~180K public chargers;</a:t>
+                      </a:r>
+                      <a:endParaRPr lang="en-US" sz="900" dirty="0">
+                        <a:latin typeface="Calibri" charset="0"/>
+                        <a:ea typeface="Calibri" charset="0"/>
+                        <a:cs typeface="Calibri" charset="0"/>
+                      </a:endParaRPr>
+                    </a:p>
+                    <a:p>
+                      <a:pPr indent="0" marL="0">
+                        <a:buNone/>
+                      </a:pPr>
+                      <a:r>
+                        <a:rPr lang="en-US" sz="900" dirty="0">
+                          <a:solidFill>
+                            <a:srgbClr val="333333"/>
+                          </a:solidFill>
+                          <a:latin typeface="Calibri" pitchFamily="34" charset="0"/>
+                          <a:ea typeface="Calibri" pitchFamily="34" charset="-122"/>
+                          <a:cs typeface="Calibri" pitchFamily="34" charset="-120"/>
+                        </a:rPr>
+                        <a:t>NEVI program $7.5B;</a:t>
+                      </a:r>
+                      <a:endParaRPr lang="en-US" sz="900" dirty="0">
+                        <a:latin typeface="Calibri" charset="0"/>
+                        <a:ea typeface="Calibri" charset="0"/>
+                        <a:cs typeface="Calibri" charset="0"/>
+                      </a:endParaRPr>
+                    </a:p>
+                    <a:p>
+                      <a:pPr indent="0" marL="0">
+                        <a:buNone/>
+                      </a:pPr>
+                      <a:r>
+                        <a:rPr lang="en-US" sz="900" dirty="0">
+                          <a:solidFill>
+                            <a:srgbClr val="333333"/>
+                          </a:solidFill>
+                          <a:latin typeface="Calibri" pitchFamily="34" charset="0"/>
+                          <a:ea typeface="Calibri" pitchFamily="34" charset="-122"/>
+                          <a:cs typeface="Calibri" pitchFamily="34" charset="-120"/>
+                        </a:rPr>
+                        <a:t>lagging vs China/EU</a:t>
+                      </a:r>
+                      <a:endParaRPr lang="en-US" sz="900" dirty="0">
                         <a:latin typeface="Calibri" charset="0"/>
                         <a:ea typeface="Calibri" charset="0"/>
                         <a:cs typeface="Calibri" charset="0"/>
                       </a:endParaRPr>
                     </a:p>
                   </a:txBody>
-                  <a:tcPr marL="50800" marR="50800" marT="25400" marB="25400" anchor="ctr">
-                    <a:lnL w="0" cap="flat" cmpd="sng" algn="ctr">
-                      <a:solidFill>
-                        <a:srgbClr val="FFFFFF"/>
+                  <a:tcPr marL="91440" marR="91440" marT="45720" marB="45720" anchor="ctr">
+                    <a:lnL w="9525" cap="flat" cmpd="sng" algn="ctr">
+                      <a:solidFill>
+                        <a:srgbClr val="C0C0C0"/>
                       </a:solidFill>
                       <a:prstDash val="solid"/>
                       <a:round/>
                       <a:headEnd type="none" w="med" len="med"/>
                       <a:tailEnd type="none" w="med" len="med"/>
                     </a:lnL>
-                    <a:lnR w="0" cap="flat" cmpd="sng" algn="ctr">
-                      <a:solidFill>
-                        <a:srgbClr val="FFFFFF"/>
+                    <a:lnR w="9525" cap="flat" cmpd="sng" algn="ctr">
+                      <a:solidFill>
+                        <a:srgbClr val="C0C0C0"/>
                       </a:solidFill>
                       <a:prstDash val="solid"/>
                       <a:round/>
                       <a:headEnd type="none" w="med" len="med"/>
                       <a:tailEnd type="none" w="med" len="med"/>
                     </a:lnR>
-                    <a:lnT w="0" cap="flat" cmpd="sng" algn="ctr">
-                      <a:solidFill>
-                        <a:srgbClr val="FFFFFF"/>
+                    <a:lnT w="9525" cap="flat" cmpd="sng" algn="ctr">
+                      <a:solidFill>
+                        <a:srgbClr val="C0C0C0"/>
                       </a:solidFill>
                       <a:prstDash val="solid"/>
                       <a:round/>
                       <a:headEnd type="none" w="med" len="med"/>
                       <a:tailEnd type="none" w="med" len="med"/>
                     </a:lnT>
-                    <a:lnB w="12700" cap="flat" cmpd="sng" algn="ctr">
-                      <a:solidFill>
-                        <a:srgbClr val="0C2340"/>
+                    <a:lnB w="9525" cap="flat" cmpd="sng" algn="ctr">
+                      <a:solidFill>
+                        <a:srgbClr val="C0C0C0"/>
                       </a:solidFill>
                       <a:prstDash val="solid"/>
                       <a:round/>
                       <a:headEnd type="none" w="med" len="med"/>
                       <a:tailEnd type="none" w="med" len="med"/>
                     </a:lnB>
+                    <a:solidFill>
+                      <a:srgbClr val="FFFFFF"/>
+                    </a:solidFill>
+                  </a:tcPr>
+                </a:tc>
+              </a:tr>
+              <a:tr h="457200">
+                <a:tc>
+                  <a:txBody>
+                    <a:bodyPr/>
+                    <a:lstStyle/>
+                    <a:p>
+                      <a:pPr indent="0" marL="0">
+                        <a:buNone/>
+                      </a:pPr>
+                      <a:r>
+                        <a:rPr lang="en-US" sz="900" b="1" dirty="0">
+                          <a:solidFill>
+                            <a:srgbClr val="000000"/>
+                          </a:solidFill>
+                          <a:latin typeface="Calibri" pitchFamily="34" charset="0"/>
+                          <a:ea typeface="Calibri" pitchFamily="34" charset="-122"/>
+                          <a:cs typeface="Calibri" pitchFamily="34" charset="-120"/>
+                        </a:rPr>
+                        <a:t>Market</a:t>
+                      </a:r>
+                      <a:endParaRPr lang="en-US" sz="900" dirty="0">
+                        <a:latin typeface="Calibri" charset="0"/>
+                        <a:ea typeface="Calibri" charset="0"/>
+                        <a:cs typeface="Calibri" charset="0"/>
+                      </a:endParaRPr>
+                    </a:p>
+                    <a:p>
+                      <a:pPr indent="0" marL="0">
+                        <a:buNone/>
+                      </a:pPr>
+                      <a:r>
+                        <a:rPr lang="en-US" sz="900" b="1" dirty="0">
+                          <a:solidFill>
+                            <a:srgbClr val="000000"/>
+                          </a:solidFill>
+                          <a:latin typeface="Calibri" pitchFamily="34" charset="0"/>
+                          <a:ea typeface="Calibri" pitchFamily="34" charset="-122"/>
+                          <a:cs typeface="Calibri" pitchFamily="34" charset="-120"/>
+                        </a:rPr>
+                        <a:t>outlook</a:t>
+                      </a:r>
+                      <a:endParaRPr lang="en-US" sz="900" dirty="0">
+                        <a:latin typeface="Calibri" charset="0"/>
+                        <a:ea typeface="Calibri" charset="0"/>
+                        <a:cs typeface="Calibri" charset="0"/>
+                      </a:endParaRPr>
+                    </a:p>
+                  </a:txBody>
+                  <a:tcPr marL="91440" marR="91440" marT="45720" marB="45720" anchor="ctr">
+                    <a:lnL w="9525" cap="flat" cmpd="sng" algn="ctr">
+                      <a:solidFill>
+                        <a:srgbClr val="C0C0C0"/>
+                      </a:solidFill>
+                      <a:prstDash val="solid"/>
+                      <a:round/>
+                      <a:headEnd type="none" w="med" len="med"/>
+                      <a:tailEnd type="none" w="med" len="med"/>
+                    </a:lnL>
+                    <a:lnR w="9525" cap="flat" cmpd="sng" algn="ctr">
+                      <a:solidFill>
+                        <a:srgbClr val="C0C0C0"/>
+                      </a:solidFill>
+                      <a:prstDash val="solid"/>
+                      <a:round/>
+                      <a:headEnd type="none" w="med" len="med"/>
+                      <a:tailEnd type="none" w="med" len="med"/>
+                    </a:lnR>
+                    <a:lnT w="9525" cap="flat" cmpd="sng" algn="ctr">
+                      <a:solidFill>
+                        <a:srgbClr val="C0C0C0"/>
+                      </a:solidFill>
+                      <a:prstDash val="solid"/>
+                      <a:round/>
+                      <a:headEnd type="none" w="med" len="med"/>
+                      <a:tailEnd type="none" w="med" len="med"/>
+                    </a:lnT>
+                    <a:lnB w="9525" cap="flat" cmpd="sng" algn="ctr">
+                      <a:solidFill>
+                        <a:srgbClr val="C0C0C0"/>
+                      </a:solidFill>
+                      <a:prstDash val="solid"/>
+                      <a:round/>
+                      <a:headEnd type="none" w="med" len="med"/>
+                      <a:tailEnd type="none" w="med" len="med"/>
+                    </a:lnB>
+                    <a:solidFill>
+                      <a:srgbClr val="FFFFFF"/>
+                    </a:solidFill>
                   </a:tcPr>
                 </a:tc>
                 <a:tc>
@@ -3316,64 +3299,109 @@
                     <a:bodyPr/>
                     <a:lstStyle/>
                     <a:p>
-                      <a:pPr algn="ctr" indent="0" marL="0">
-                        <a:buNone/>
-                      </a:pPr>
-                      <a:r>
-                        <a:rPr lang="en-US" sz="800" dirty="0">
-                          <a:solidFill>
-                            <a:srgbClr val="404040"/>
-                          </a:solidFill>
-                          <a:latin typeface="Calibri" pitchFamily="34" charset="0"/>
-                          <a:ea typeface="Calibri" pitchFamily="34" charset="-122"/>
-                          <a:cs typeface="Calibri" pitchFamily="34" charset="-120"/>
-                        </a:rPr>
-                        <a:t>8.0</a:t>
-                      </a:r>
-                      <a:endParaRPr lang="en-US" sz="800" dirty="0">
+                      <a:pPr indent="0" marL="0">
+                        <a:buNone/>
+                      </a:pPr>
+                      <a:r>
+                        <a:rPr lang="en-US" sz="900" dirty="0">
+                          <a:solidFill>
+                            <a:srgbClr val="333333"/>
+                          </a:solidFill>
+                          <a:latin typeface="Calibri" pitchFamily="34" charset="0"/>
+                          <a:ea typeface="Calibri" pitchFamily="34" charset="-122"/>
+                          <a:cs typeface="Calibri" pitchFamily="34" charset="-120"/>
+                        </a:rPr>
+                        <a:t>Dominant position; focus</a:t>
+                      </a:r>
+                      <a:endParaRPr lang="en-US" sz="900" dirty="0">
+                        <a:latin typeface="Calibri" charset="0"/>
+                        <a:ea typeface="Calibri" charset="0"/>
+                        <a:cs typeface="Calibri" charset="0"/>
+                      </a:endParaRPr>
+                    </a:p>
+                    <a:p>
+                      <a:pPr indent="0" marL="0">
+                        <a:buNone/>
+                      </a:pPr>
+                      <a:r>
+                        <a:rPr lang="en-US" sz="900" dirty="0">
+                          <a:solidFill>
+                            <a:srgbClr val="333333"/>
+                          </a:solidFill>
+                          <a:latin typeface="Calibri" pitchFamily="34" charset="0"/>
+                          <a:ea typeface="Calibri" pitchFamily="34" charset="-122"/>
+                          <a:cs typeface="Calibri" pitchFamily="34" charset="-120"/>
+                        </a:rPr>
+                        <a:t>shifting to exports and</a:t>
+                      </a:r>
+                      <a:endParaRPr lang="en-US" sz="900" dirty="0">
+                        <a:latin typeface="Calibri" charset="0"/>
+                        <a:ea typeface="Calibri" charset="0"/>
+                        <a:cs typeface="Calibri" charset="0"/>
+                      </a:endParaRPr>
+                    </a:p>
+                    <a:p>
+                      <a:pPr indent="0" marL="0">
+                        <a:buNone/>
+                      </a:pPr>
+                      <a:r>
+                        <a:rPr lang="en-US" sz="900" dirty="0">
+                          <a:solidFill>
+                            <a:srgbClr val="333333"/>
+                          </a:solidFill>
+                          <a:latin typeface="Calibri" pitchFamily="34" charset="0"/>
+                          <a:ea typeface="Calibri" pitchFamily="34" charset="-122"/>
+                          <a:cs typeface="Calibri" pitchFamily="34" charset="-120"/>
+                        </a:rPr>
+                        <a:t>next-gen battery tech</a:t>
+                      </a:r>
+                      <a:endParaRPr lang="en-US" sz="900" dirty="0">
                         <a:latin typeface="Calibri" charset="0"/>
                         <a:ea typeface="Calibri" charset="0"/>
                         <a:cs typeface="Calibri" charset="0"/>
                       </a:endParaRPr>
                     </a:p>
                   </a:txBody>
-                  <a:tcPr marL="50800" marR="50800" marT="25400" marB="25400" anchor="ctr">
-                    <a:lnL w="0" cap="flat" cmpd="sng" algn="ctr">
-                      <a:solidFill>
-                        <a:srgbClr val="FFFFFF"/>
+                  <a:tcPr marL="91440" marR="91440" marT="45720" marB="45720" anchor="ctr">
+                    <a:lnL w="9525" cap="flat" cmpd="sng" algn="ctr">
+                      <a:solidFill>
+                        <a:srgbClr val="C0C0C0"/>
                       </a:solidFill>
                       <a:prstDash val="solid"/>
                       <a:round/>
                       <a:headEnd type="none" w="med" len="med"/>
                       <a:tailEnd type="none" w="med" len="med"/>
                     </a:lnL>
-                    <a:lnR w="0" cap="flat" cmpd="sng" algn="ctr">
-                      <a:solidFill>
-                        <a:srgbClr val="FFFFFF"/>
+                    <a:lnR w="9525" cap="flat" cmpd="sng" algn="ctr">
+                      <a:solidFill>
+                        <a:srgbClr val="C0C0C0"/>
                       </a:solidFill>
                       <a:prstDash val="solid"/>
                       <a:round/>
                       <a:headEnd type="none" w="med" len="med"/>
                       <a:tailEnd type="none" w="med" len="med"/>
                     </a:lnR>
-                    <a:lnT w="0" cap="flat" cmpd="sng" algn="ctr">
-                      <a:solidFill>
-                        <a:srgbClr val="FFFFFF"/>
+                    <a:lnT w="9525" cap="flat" cmpd="sng" algn="ctr">
+                      <a:solidFill>
+                        <a:srgbClr val="C0C0C0"/>
                       </a:solidFill>
                       <a:prstDash val="solid"/>
                       <a:round/>
                       <a:headEnd type="none" w="med" len="med"/>
                       <a:tailEnd type="none" w="med" len="med"/>
                     </a:lnT>
-                    <a:lnB w="12700" cap="flat" cmpd="sng" algn="ctr">
-                      <a:solidFill>
-                        <a:srgbClr val="0C2340"/>
+                    <a:lnB w="9525" cap="flat" cmpd="sng" algn="ctr">
+                      <a:solidFill>
+                        <a:srgbClr val="C0C0C0"/>
                       </a:solidFill>
                       <a:prstDash val="solid"/>
                       <a:round/>
                       <a:headEnd type="none" w="med" len="med"/>
                       <a:tailEnd type="none" w="med" len="med"/>
                     </a:lnB>
+                    <a:solidFill>
+                      <a:srgbClr val="FFFFFF"/>
+                    </a:solidFill>
                   </a:tcPr>
                 </a:tc>
                 <a:tc>
@@ -3381,64 +3409,219 @@
                     <a:bodyPr/>
                     <a:lstStyle/>
                     <a:p>
-                      <a:pPr algn="ctr" indent="0" marL="0">
-                        <a:buNone/>
-                      </a:pPr>
-                      <a:r>
-                        <a:rPr lang="en-US" sz="800" dirty="0">
-                          <a:solidFill>
-                            <a:srgbClr val="404040"/>
-                          </a:solidFill>
-                          <a:latin typeface="Calibri" pitchFamily="34" charset="0"/>
-                          <a:ea typeface="Calibri" pitchFamily="34" charset="-122"/>
-                          <a:cs typeface="Calibri" pitchFamily="34" charset="-120"/>
-                        </a:rPr>
-                        <a:t>15+</a:t>
-                      </a:r>
-                      <a:endParaRPr lang="en-US" sz="800" dirty="0">
+                      <a:pPr indent="0" marL="0">
+                        <a:buNone/>
+                      </a:pPr>
+                      <a:r>
+                        <a:rPr lang="en-US" sz="900" dirty="0">
+                          <a:solidFill>
+                            <a:srgbClr val="333333"/>
+                          </a:solidFill>
+                          <a:latin typeface="Calibri" pitchFamily="34" charset="0"/>
+                          <a:ea typeface="Calibri" pitchFamily="34" charset="-122"/>
+                          <a:cs typeface="Calibri" pitchFamily="34" charset="-120"/>
+                        </a:rPr>
+                        <a:t>Steady growth; regulatory</a:t>
+                      </a:r>
+                      <a:endParaRPr lang="en-US" sz="900" dirty="0">
+                        <a:latin typeface="Calibri" charset="0"/>
+                        <a:ea typeface="Calibri" charset="0"/>
+                        <a:cs typeface="Calibri" charset="0"/>
+                      </a:endParaRPr>
+                    </a:p>
+                    <a:p>
+                      <a:pPr indent="0" marL="0">
+                        <a:buNone/>
+                      </a:pPr>
+                      <a:r>
+                        <a:rPr lang="en-US" sz="900" dirty="0">
+                          <a:solidFill>
+                            <a:srgbClr val="333333"/>
+                          </a:solidFill>
+                          <a:latin typeface="Calibri" pitchFamily="34" charset="0"/>
+                          <a:ea typeface="Calibri" pitchFamily="34" charset="-122"/>
+                          <a:cs typeface="Calibri" pitchFamily="34" charset="-120"/>
+                        </a:rPr>
+                        <a:t>pressure maintains</a:t>
+                      </a:r>
+                      <a:endParaRPr lang="en-US" sz="900" dirty="0">
+                        <a:latin typeface="Calibri" charset="0"/>
+                        <a:ea typeface="Calibri" charset="0"/>
+                        <a:cs typeface="Calibri" charset="0"/>
+                      </a:endParaRPr>
+                    </a:p>
+                    <a:p>
+                      <a:pPr indent="0" marL="0">
+                        <a:buNone/>
+                      </a:pPr>
+                      <a:r>
+                        <a:rPr lang="en-US" sz="900" dirty="0">
+                          <a:solidFill>
+                            <a:srgbClr val="333333"/>
+                          </a:solidFill>
+                          <a:latin typeface="Calibri" pitchFamily="34" charset="0"/>
+                          <a:ea typeface="Calibri" pitchFamily="34" charset="-122"/>
+                          <a:cs typeface="Calibri" pitchFamily="34" charset="-120"/>
+                        </a:rPr>
+                        <a:t>momentum</a:t>
+                      </a:r>
+                      <a:endParaRPr lang="en-US" sz="900" dirty="0">
                         <a:latin typeface="Calibri" charset="0"/>
                         <a:ea typeface="Calibri" charset="0"/>
                         <a:cs typeface="Calibri" charset="0"/>
                       </a:endParaRPr>
                     </a:p>
                   </a:txBody>
-                  <a:tcPr marL="50800" marR="50800" marT="25400" marB="25400" anchor="ctr">
-                    <a:lnL w="0" cap="flat" cmpd="sng" algn="ctr">
-                      <a:solidFill>
-                        <a:srgbClr val="FFFFFF"/>
+                  <a:tcPr marL="91440" marR="91440" marT="45720" marB="45720" anchor="ctr">
+                    <a:lnL w="9525" cap="flat" cmpd="sng" algn="ctr">
+                      <a:solidFill>
+                        <a:srgbClr val="C0C0C0"/>
                       </a:solidFill>
                       <a:prstDash val="solid"/>
                       <a:round/>
                       <a:headEnd type="none" w="med" len="med"/>
                       <a:tailEnd type="none" w="med" len="med"/>
                     </a:lnL>
-                    <a:lnR w="0" cap="flat" cmpd="sng" algn="ctr">
-                      <a:solidFill>
-                        <a:srgbClr val="FFFFFF"/>
+                    <a:lnR w="9525" cap="flat" cmpd="sng" algn="ctr">
+                      <a:solidFill>
+                        <a:srgbClr val="C0C0C0"/>
                       </a:solidFill>
                       <a:prstDash val="solid"/>
                       <a:round/>
                       <a:headEnd type="none" w="med" len="med"/>
                       <a:tailEnd type="none" w="med" len="med"/>
                     </a:lnR>
-                    <a:lnT w="0" cap="flat" cmpd="sng" algn="ctr">
-                      <a:solidFill>
-                        <a:srgbClr val="FFFFFF"/>
+                    <a:lnT w="9525" cap="flat" cmpd="sng" algn="ctr">
+                      <a:solidFill>
+                        <a:srgbClr val="C0C0C0"/>
                       </a:solidFill>
                       <a:prstDash val="solid"/>
                       <a:round/>
                       <a:headEnd type="none" w="med" len="med"/>
                       <a:tailEnd type="none" w="med" len="med"/>
                     </a:lnT>
-                    <a:lnB w="12700" cap="flat" cmpd="sng" algn="ctr">
-                      <a:solidFill>
-                        <a:srgbClr val="0C2340"/>
+                    <a:lnB w="9525" cap="flat" cmpd="sng" algn="ctr">
+                      <a:solidFill>
+                        <a:srgbClr val="C0C0C0"/>
                       </a:solidFill>
                       <a:prstDash val="solid"/>
                       <a:round/>
                       <a:headEnd type="none" w="med" len="med"/>
                       <a:tailEnd type="none" w="med" len="med"/>
                     </a:lnB>
+                    <a:solidFill>
+                      <a:srgbClr val="FFFFFF"/>
+                    </a:solidFill>
+                  </a:tcPr>
+                </a:tc>
+                <a:tc>
+                  <a:txBody>
+                    <a:bodyPr/>
+                    <a:lstStyle/>
+                    <a:p>
+                      <a:pPr indent="0" marL="0">
+                        <a:buNone/>
+                      </a:pPr>
+                      <a:r>
+                        <a:rPr lang="en-US" sz="900" dirty="0">
+                          <a:solidFill>
+                            <a:srgbClr val="333333"/>
+                          </a:solidFill>
+                          <a:latin typeface="Calibri" pitchFamily="34" charset="0"/>
+                          <a:ea typeface="Calibri" pitchFamily="34" charset="-122"/>
+                          <a:cs typeface="Calibri" pitchFamily="34" charset="-120"/>
+                        </a:rPr>
+                        <a:t>Strong growth trajectory;</a:t>
+                      </a:r>
+                      <a:endParaRPr lang="en-US" sz="900" dirty="0">
+                        <a:latin typeface="Calibri" charset="0"/>
+                        <a:ea typeface="Calibri" charset="0"/>
+                        <a:cs typeface="Calibri" charset="0"/>
+                      </a:endParaRPr>
+                    </a:p>
+                    <a:p>
+                      <a:pPr indent="0" marL="0">
+                        <a:buNone/>
+                      </a:pPr>
+                      <a:r>
+                        <a:rPr lang="en-US" sz="900" dirty="0">
+                          <a:solidFill>
+                            <a:srgbClr val="333333"/>
+                          </a:solidFill>
+                          <a:latin typeface="Calibri" pitchFamily="34" charset="0"/>
+                          <a:ea typeface="Calibri" pitchFamily="34" charset="-122"/>
+                          <a:cs typeface="Calibri" pitchFamily="34" charset="-120"/>
+                        </a:rPr>
+                        <a:t>IRA driving domestic</a:t>
+                      </a:r>
+                      <a:endParaRPr lang="en-US" sz="900" dirty="0">
+                        <a:latin typeface="Calibri" charset="0"/>
+                        <a:ea typeface="Calibri" charset="0"/>
+                        <a:cs typeface="Calibri" charset="0"/>
+                      </a:endParaRPr>
+                    </a:p>
+                    <a:p>
+                      <a:pPr indent="0" marL="0">
+                        <a:buNone/>
+                      </a:pPr>
+                      <a:r>
+                        <a:rPr lang="en-US" sz="900" dirty="0">
+                          <a:solidFill>
+                            <a:srgbClr val="333333"/>
+                          </a:solidFill>
+                          <a:latin typeface="Calibri" pitchFamily="34" charset="0"/>
+                          <a:ea typeface="Calibri" pitchFamily="34" charset="-122"/>
+                          <a:cs typeface="Calibri" pitchFamily="34" charset="-120"/>
+                        </a:rPr>
+                        <a:t>manufacturing expansion</a:t>
+                      </a:r>
+                      <a:endParaRPr lang="en-US" sz="900" dirty="0">
+                        <a:latin typeface="Calibri" charset="0"/>
+                        <a:ea typeface="Calibri" charset="0"/>
+                        <a:cs typeface="Calibri" charset="0"/>
+                      </a:endParaRPr>
+                    </a:p>
+                  </a:txBody>
+                  <a:tcPr marL="91440" marR="91440" marT="45720" marB="45720" anchor="ctr">
+                    <a:lnL w="9525" cap="flat" cmpd="sng" algn="ctr">
+                      <a:solidFill>
+                        <a:srgbClr val="C0C0C0"/>
+                      </a:solidFill>
+                      <a:prstDash val="solid"/>
+                      <a:round/>
+                      <a:headEnd type="none" w="med" len="med"/>
+                      <a:tailEnd type="none" w="med" len="med"/>
+                    </a:lnL>
+                    <a:lnR w="9525" cap="flat" cmpd="sng" algn="ctr">
+                      <a:solidFill>
+                        <a:srgbClr val="C0C0C0"/>
+                      </a:solidFill>
+                      <a:prstDash val="solid"/>
+                      <a:round/>
+                      <a:headEnd type="none" w="med" len="med"/>
+                      <a:tailEnd type="none" w="med" len="med"/>
+                    </a:lnR>
+                    <a:lnT w="9525" cap="flat" cmpd="sng" algn="ctr">
+                      <a:solidFill>
+                        <a:srgbClr val="C0C0C0"/>
+                      </a:solidFill>
+                      <a:prstDash val="solid"/>
+                      <a:round/>
+                      <a:headEnd type="none" w="med" len="med"/>
+                      <a:tailEnd type="none" w="med" len="med"/>
+                    </a:lnT>
+                    <a:lnB w="9525" cap="flat" cmpd="sng" algn="ctr">
+                      <a:solidFill>
+                        <a:srgbClr val="C0C0C0"/>
+                      </a:solidFill>
+                      <a:prstDash val="solid"/>
+                      <a:round/>
+                      <a:headEnd type="none" w="med" len="med"/>
+                      <a:tailEnd type="none" w="med" len="med"/>
+                    </a:lnB>
+                    <a:solidFill>
+                      <a:srgbClr val="FFFFFF"/>
+                    </a:solidFill>
                   </a:tcPr>
                 </a:tc>
               </a:tr>
@@ -3448,14 +3631,14 @@
       </p:graphicFrame>
       <p:sp>
         <p:nvSpPr>
-          <p:cNvPr id="31" name="Text 28"/>
+          <p:cNvPr id="7" name="Text 4"/>
           <p:cNvSpPr/>
           <p:nvPr/>
         </p:nvSpPr>
         <p:spPr>
           <a:xfrm>
-            <a:off x="457200" y="5029200"/>
-            <a:ext cx="9144000" cy="228600"/>
+            <a:off x="457200" y="4160520"/>
+            <a:ext cx="7315200" cy="182880"/>
           </a:xfrm>
           <a:prstGeom prst="rect">
             <a:avLst/>
@@ -3464,37 +3647,37 @@
           <a:ln/>
         </p:spPr>
         <p:txBody>
-          <a:bodyPr wrap="square" lIns="0" tIns="0" rIns="0" bIns="0" rtlCol="0" anchor="t"/>
+          <a:bodyPr wrap="square" lIns="0" tIns="0" rIns="0" bIns="0" rtlCol="0" anchor="ctr"/>
           <a:lstStyle/>
           <a:p>
             <a:pPr indent="0" marL="0">
               <a:buNone/>
             </a:pPr>
             <a:r>
-              <a:rPr lang="en-US" sz="700" i="1" dirty="0">
+              <a:rPr lang="en-US" sz="650" dirty="0">
                 <a:solidFill>
-                  <a:srgbClr val="999999"/>
+                  <a:srgbClr val="666666"/>
                 </a:solidFill>
                 <a:latin typeface="Calibri" pitchFamily="34" charset="0"/>
                 <a:ea typeface="Calibri" pitchFamily="34" charset="-122"/>
                 <a:cs typeface="Calibri" pitchFamily="34" charset="-120"/>
               </a:rPr>
-              <a:t>1. Capacity and cost projections based on Dutch government targets and McKinsey Energy Insights analysis</a:t>
+              <a:t>Source: IEA Global EV Outlook 2024; McKinsey Center for Future Mobility; BloombergNEF EV Market Tracker</a:t>
             </a:r>
-            <a:endParaRPr lang="en-US" sz="700" dirty="0"/>
+            <a:endParaRPr lang="en-US" sz="650" dirty="0"/>
           </a:p>
         </p:txBody>
       </p:sp>
       <p:sp>
         <p:nvSpPr>
-          <p:cNvPr id="32" name="Shape 29"/>
+          <p:cNvPr id="8" name="Shape 5"/>
           <p:cNvSpPr/>
           <p:nvPr/>
         </p:nvSpPr>
         <p:spPr>
           <a:xfrm>
-            <a:off x="457200" y="6035040"/>
-            <a:ext cx="11274552" cy="0"/>
+            <a:off x="457200" y="4709160"/>
+            <a:ext cx="8229600" cy="0"/>
           </a:xfrm>
           <a:prstGeom prst="line">
             <a:avLst/>
@@ -3510,14 +3693,14 @@
       </p:sp>
       <p:sp>
         <p:nvSpPr>
-          <p:cNvPr id="33" name="Text 30"/>
+          <p:cNvPr id="9" name="Text 6"/>
           <p:cNvSpPr/>
           <p:nvPr/>
         </p:nvSpPr>
         <p:spPr>
           <a:xfrm>
-            <a:off x="457200" y="6080760"/>
-            <a:ext cx="7315200" cy="228600"/>
+            <a:off x="6400800" y="4736592"/>
+            <a:ext cx="2286000" cy="182880"/>
           </a:xfrm>
           <a:prstGeom prst="rect">
             <a:avLst/>
@@ -3526,75 +3709,22 @@
           <a:ln/>
         </p:spPr>
         <p:txBody>
-          <a:bodyPr wrap="square" lIns="0" tIns="0" rIns="0" bIns="0" rtlCol="0" anchor="t"/>
-          <a:lstStyle/>
-          <a:p>
-            <a:pPr indent="0" marL="0">
-              <a:buNone/>
-            </a:pPr>
-            <a:r>
-              <a:rPr lang="en-US" sz="700" dirty="0">
-                <a:solidFill>
-                  <a:srgbClr val="999999"/>
-                </a:solidFill>
-                <a:latin typeface="Calibri" pitchFamily="34" charset="0"/>
-                <a:ea typeface="Calibri" pitchFamily="34" charset="-122"/>
-                <a:cs typeface="Calibri" pitchFamily="34" charset="-120"/>
-              </a:rPr>
-              <a:t>Source: Dutch National Hydrogen Strategy; REPowerEU; McKinsey Energy Insights</a:t>
-            </a:r>
-            <a:endParaRPr lang="en-US" sz="700" dirty="0"/>
-          </a:p>
-        </p:txBody>
-      </p:sp>
-      <p:sp>
-        <p:nvSpPr>
-          <p:cNvPr id="34" name="Text 31"/>
-          <p:cNvSpPr/>
-          <p:nvPr/>
-        </p:nvSpPr>
-        <p:spPr>
-          <a:xfrm>
-            <a:off x="8686800" y="6080760"/>
-            <a:ext cx="3044952" cy="228600"/>
-          </a:xfrm>
-          <a:prstGeom prst="rect">
-            <a:avLst/>
-          </a:prstGeom>
-          <a:noFill/>
-          <a:ln/>
-        </p:spPr>
-        <p:txBody>
-          <a:bodyPr wrap="square" lIns="0" tIns="0" rIns="0" bIns="0" rtlCol="0" anchor="t"/>
+          <a:bodyPr wrap="square" lIns="0" tIns="0" rIns="0" bIns="0" rtlCol="0" anchor="ctr"/>
           <a:lstStyle/>
           <a:p>
             <a:pPr algn="r" indent="0" marL="0">
               <a:buNone/>
             </a:pPr>
             <a:r>
-              <a:rPr lang="en-US" sz="800" b="1" dirty="0">
+              <a:rPr lang="en-US" sz="800" dirty="0">
                 <a:solidFill>
-                  <a:srgbClr val="000000"/>
+                  <a:srgbClr val="666666"/>
                 </a:solidFill>
                 <a:latin typeface="Calibri" pitchFamily="34" charset="0"/>
                 <a:ea typeface="Calibri" pitchFamily="34" charset="-122"/>
                 <a:cs typeface="Calibri" pitchFamily="34" charset="-120"/>
               </a:rPr>
-              <a:t>McKinsey &amp; Company</a:t>
-            </a:r>
-            <a:pPr algn="r" indent="0" marL="0">
-              <a:buNone/>
-            </a:pPr>
-            <a:r>
-              <a:rPr lang="en-US" sz="800" dirty="0">
-                <a:solidFill>
-                  <a:srgbClr val="000000"/>
-                </a:solidFill>
-                <a:latin typeface="Calibri" pitchFamily="34" charset="0"/>
-                <a:ea typeface="Calibri" pitchFamily="34" charset="-122"/>
-                <a:cs typeface="Calibri" pitchFamily="34" charset="-120"/>
-              </a:rPr>
-              <a:t>  1</a:t>
+              <a:t>McKinsey &amp; Company    5</a:t>
             </a:r>
             <a:endParaRPr lang="en-US" sz="800" dirty="0"/>
           </a:p>
